--- a/folletos/2026-04/pptx/FIP_VANTRUST_LIQUIDEZ_LOCAL.pptx
+++ b/folletos/2026-04/pptx/FIP_VANTRUST_LIQUIDEZ_LOCAL.pptx
@@ -2927,7 +2927,7 @@
                 <a:ea typeface="Calibri" pitchFamily="34" charset="-122"/>
                 <a:cs typeface="Calibri" pitchFamily="34" charset="-120"/>
               </a:rPr>
-              <a:t>prueba CLP</a:t>
+              <a:t>prueba 2 CLP</a:t>
             </a:r>
             <a:endParaRPr lang="en-US" sz="800" dirty="0"/>
           </a:p>

--- a/folletos/2026-04/pptx/FIP_VANTRUST_LIQUIDEZ_LOCAL.pptx
+++ b/folletos/2026-04/pptx/FIP_VANTRUST_LIQUIDEZ_LOCAL.pptx
@@ -5363,7 +5363,7 @@
                 <a:ea typeface="Calibri" pitchFamily="34" charset="-122"/>
                 <a:cs typeface="Calibri" pitchFamily="34" charset="-120"/>
               </a:rPr>
-              <a:t>prueba CLP</a:t>
+              <a:t>prueba 3 CLP</a:t>
             </a:r>
             <a:endParaRPr lang="en-US" sz="800" dirty="0"/>
           </a:p>

--- a/folletos/2026-04/pptx/FIP_VANTRUST_LIQUIDEZ_LOCAL.pptx
+++ b/folletos/2026-04/pptx/FIP_VANTRUST_LIQUIDEZ_LOCAL.pptx
@@ -6323,7 +6323,7 @@
                 <a:ea typeface="Calibri" pitchFamily="34" charset="-122"/>
                 <a:cs typeface="Calibri" pitchFamily="34" charset="-120"/>
               </a:rPr>
-              <a:t>prueba CLP</a:t>
+              <a:t>prueba 4 CLP</a:t>
             </a:r>
             <a:endParaRPr lang="en-US" sz="800" dirty="0"/>
           </a:p>

--- a/folletos/2026-04/pptx/FIP_VANTRUST_LIQUIDEZ_LOCAL.pptx
+++ b/folletos/2026-04/pptx/FIP_VANTRUST_LIQUIDEZ_LOCAL.pptx
@@ -6373,7 +6373,7 @@
                 <a:ea typeface="Calibri" pitchFamily="34" charset="-122"/>
                 <a:cs typeface="Calibri" pitchFamily="34" charset="-120"/>
               </a:rPr>
-              <a:t>prueba CLP</a:t>
+              <a:t>prueba 6 CLP</a:t>
             </a:r>
             <a:endParaRPr lang="en-US" sz="800" dirty="0"/>
           </a:p>

--- a/folletos/2026-04/pptx/FIP_VANTRUST_LIQUIDEZ_LOCAL.pptx
+++ b/folletos/2026-04/pptx/FIP_VANTRUST_LIQUIDEZ_LOCAL.pptx
@@ -6373,7 +6373,7 @@
                 <a:ea typeface="Calibri" pitchFamily="34" charset="-122"/>
                 <a:cs typeface="Calibri" pitchFamily="34" charset="-120"/>
               </a:rPr>
-              <a:t>prueba 6 CLP</a:t>
+              <a:t>prueba CLP</a:t>
             </a:r>
             <a:endParaRPr lang="en-US" sz="800" dirty="0"/>
           </a:p>
@@ -33352,13 +33352,91 @@
       </p:sp>
       <p:sp>
         <p:nvSpPr>
-          <p:cNvPr id="8" name="Shape 6"/>
+          <p:cNvPr id="8" name="Text 6"/>
           <p:cNvSpPr/>
           <p:nvPr/>
         </p:nvSpPr>
         <p:spPr>
           <a:xfrm>
-            <a:off x="118872" y="1810512"/>
+            <a:off x="118872" y="1719072"/>
+            <a:ext cx="1188720" cy="173736"/>
+          </a:xfrm>
+          <a:prstGeom prst="rect">
+            <a:avLst/>
+          </a:prstGeom>
+          <a:noFill/>
+          <a:ln/>
+        </p:spPr>
+        <p:txBody>
+          <a:bodyPr wrap="square" lIns="0" tIns="0" rIns="0" bIns="0" rtlCol="0" anchor="ctr"/>
+          <a:lstStyle/>
+          <a:p>
+            <a:pPr indent="0" marL="0">
+              <a:buNone/>
+            </a:pPr>
+            <a:r>
+              <a:rPr lang="en-US" sz="750" dirty="0">
+                <a:solidFill>
+                  <a:srgbClr val="000000"/>
+                </a:solidFill>
+                <a:latin typeface="Calibri" pitchFamily="34" charset="0"/>
+                <a:ea typeface="Calibri" pitchFamily="34" charset="-122"/>
+                <a:cs typeface="Calibri" pitchFamily="34" charset="-120"/>
+              </a:rPr>
+              <a:t>CLP</a:t>
+            </a:r>
+            <a:endParaRPr lang="en-US" sz="750" dirty="0"/>
+          </a:p>
+        </p:txBody>
+      </p:sp>
+      <p:sp>
+        <p:nvSpPr>
+          <p:cNvPr id="9" name="Text 7"/>
+          <p:cNvSpPr/>
+          <p:nvPr/>
+        </p:nvSpPr>
+        <p:spPr>
+          <a:xfrm>
+            <a:off x="1307592" y="1719072"/>
+            <a:ext cx="1024128" cy="173736"/>
+          </a:xfrm>
+          <a:prstGeom prst="rect">
+            <a:avLst/>
+          </a:prstGeom>
+          <a:noFill/>
+          <a:ln/>
+        </p:spPr>
+        <p:txBody>
+          <a:bodyPr wrap="square" lIns="0" tIns="0" rIns="0" bIns="0" rtlCol="0" anchor="ctr"/>
+          <a:lstStyle/>
+          <a:p>
+            <a:pPr algn="r" indent="0" marL="0">
+              <a:buNone/>
+            </a:pPr>
+            <a:r>
+              <a:rPr lang="en-US" sz="750" b="1" dirty="0">
+                <a:solidFill>
+                  <a:srgbClr val="000000"/>
+                </a:solidFill>
+                <a:latin typeface="Calibri" pitchFamily="34" charset="0"/>
+                <a:ea typeface="Calibri" pitchFamily="34" charset="-122"/>
+                <a:cs typeface="Calibri" pitchFamily="34" charset="-120"/>
+              </a:rPr>
+              <a:t>100,00%</a:t>
+            </a:r>
+            <a:endParaRPr lang="en-US" sz="750" dirty="0"/>
+          </a:p>
+        </p:txBody>
+      </p:sp>
+      <p:sp>
+        <p:nvSpPr>
+          <p:cNvPr id="10" name="Shape 8"/>
+          <p:cNvSpPr/>
+          <p:nvPr/>
+        </p:nvSpPr>
+        <p:spPr>
+          <a:xfrm>
+            <a:off x="118872" y="2002536"/>
             <a:ext cx="2212848" cy="0"/>
           </a:xfrm>
           <a:prstGeom prst="line">
@@ -33375,13 +33453,13 @@
       </p:sp>
       <p:sp>
         <p:nvSpPr>
-          <p:cNvPr id="9" name="Text 7"/>
+          <p:cNvPr id="11" name="Text 9"/>
           <p:cNvSpPr/>
           <p:nvPr/>
         </p:nvSpPr>
         <p:spPr>
           <a:xfrm>
-            <a:off x="118872" y="1901952"/>
+            <a:off x="118872" y="2093976"/>
             <a:ext cx="2212848" cy="164592"/>
           </a:xfrm>
           <a:prstGeom prst="rect">
@@ -33414,13 +33492,13 @@
       </p:sp>
       <p:sp>
         <p:nvSpPr>
-          <p:cNvPr id="10" name="Shape 8"/>
+          <p:cNvPr id="12" name="Shape 10"/>
           <p:cNvSpPr/>
           <p:nvPr/>
         </p:nvSpPr>
         <p:spPr>
           <a:xfrm>
-            <a:off x="118872" y="2084832"/>
+            <a:off x="118872" y="2276856"/>
             <a:ext cx="2212848" cy="0"/>
           </a:xfrm>
           <a:prstGeom prst="line">
@@ -33437,13 +33515,13 @@
       </p:sp>
       <p:sp>
         <p:nvSpPr>
-          <p:cNvPr id="11" name="Text 9"/>
+          <p:cNvPr id="13" name="Text 11"/>
           <p:cNvSpPr/>
           <p:nvPr/>
         </p:nvSpPr>
         <p:spPr>
           <a:xfrm>
-            <a:off x="118872" y="2157984"/>
+            <a:off x="118872" y="2350008"/>
             <a:ext cx="1371600" cy="164592"/>
           </a:xfrm>
           <a:prstGeom prst="rect">
@@ -33476,13 +33554,13 @@
       </p:sp>
       <p:sp>
         <p:nvSpPr>
-          <p:cNvPr id="12" name="Text 10"/>
+          <p:cNvPr id="14" name="Text 12"/>
           <p:cNvSpPr/>
           <p:nvPr/>
         </p:nvSpPr>
         <p:spPr>
           <a:xfrm>
-            <a:off x="1490472" y="2157984"/>
+            <a:off x="1490472" y="2350008"/>
             <a:ext cx="841248" cy="164592"/>
           </a:xfrm>
           <a:prstGeom prst="rect">
@@ -33507,7 +33585,7 @@
                 <a:ea typeface="Calibri" pitchFamily="34" charset="-122"/>
                 <a:cs typeface="Calibri" pitchFamily="34" charset="-120"/>
               </a:rPr>
-              <a:t>100,00%</a:t>
+              <a:t>54,24%</a:t>
             </a:r>
             <a:endParaRPr lang="en-US" sz="700" dirty="0"/>
           </a:p>
@@ -33515,13 +33593,91 @@
       </p:sp>
       <p:sp>
         <p:nvSpPr>
-          <p:cNvPr id="13" name="Shape 11"/>
+          <p:cNvPr id="15" name="Text 13"/>
           <p:cNvSpPr/>
           <p:nvPr/>
         </p:nvSpPr>
         <p:spPr>
           <a:xfrm>
-            <a:off x="118872" y="2423160"/>
+            <a:off x="118872" y="2523744"/>
+            <a:ext cx="1371600" cy="164592"/>
+          </a:xfrm>
+          <a:prstGeom prst="rect">
+            <a:avLst/>
+          </a:prstGeom>
+          <a:noFill/>
+          <a:ln/>
+        </p:spPr>
+        <p:txBody>
+          <a:bodyPr wrap="square" lIns="0" tIns="0" rIns="0" bIns="0" rtlCol="0" anchor="ctr"/>
+          <a:lstStyle/>
+          <a:p>
+            <a:pPr indent="0" marL="0">
+              <a:buNone/>
+            </a:pPr>
+            <a:r>
+              <a:rPr lang="en-US" sz="700" dirty="0">
+                <a:solidFill>
+                  <a:srgbClr val="000000"/>
+                </a:solidFill>
+                <a:latin typeface="Calibri" pitchFamily="34" charset="0"/>
+                <a:ea typeface="Calibri" pitchFamily="34" charset="-122"/>
+                <a:cs typeface="Calibri" pitchFamily="34" charset="-120"/>
+              </a:rPr>
+              <a:t>Inmob</a:t>
+            </a:r>
+            <a:endParaRPr lang="en-US" sz="700" dirty="0"/>
+          </a:p>
+        </p:txBody>
+      </p:sp>
+      <p:sp>
+        <p:nvSpPr>
+          <p:cNvPr id="16" name="Text 14"/>
+          <p:cNvSpPr/>
+          <p:nvPr/>
+        </p:nvSpPr>
+        <p:spPr>
+          <a:xfrm>
+            <a:off x="1490472" y="2523744"/>
+            <a:ext cx="841248" cy="164592"/>
+          </a:xfrm>
+          <a:prstGeom prst="rect">
+            <a:avLst/>
+          </a:prstGeom>
+          <a:noFill/>
+          <a:ln/>
+        </p:spPr>
+        <p:txBody>
+          <a:bodyPr wrap="square" lIns="0" tIns="0" rIns="0" bIns="0" rtlCol="0" anchor="ctr"/>
+          <a:lstStyle/>
+          <a:p>
+            <a:pPr algn="r" indent="0" marL="0">
+              <a:buNone/>
+            </a:pPr>
+            <a:r>
+              <a:rPr lang="en-US" sz="700" b="1" dirty="0">
+                <a:solidFill>
+                  <a:srgbClr val="000000"/>
+                </a:solidFill>
+                <a:latin typeface="Calibri" pitchFamily="34" charset="0"/>
+                <a:ea typeface="Calibri" pitchFamily="34" charset="-122"/>
+                <a:cs typeface="Calibri" pitchFamily="34" charset="-120"/>
+              </a:rPr>
+              <a:t>45,76%</a:t>
+            </a:r>
+            <a:endParaRPr lang="en-US" sz="700" dirty="0"/>
+          </a:p>
+        </p:txBody>
+      </p:sp>
+      <p:sp>
+        <p:nvSpPr>
+          <p:cNvPr id="17" name="Shape 15"/>
+          <p:cNvSpPr/>
+          <p:nvPr/>
+        </p:nvSpPr>
+        <p:spPr>
+          <a:xfrm>
+            <a:off x="118872" y="2788920"/>
             <a:ext cx="2212848" cy="0"/>
           </a:xfrm>
           <a:prstGeom prst="line">
@@ -33538,13 +33694,13 @@
       </p:sp>
       <p:sp>
         <p:nvSpPr>
-          <p:cNvPr id="14" name="Text 12"/>
+          <p:cNvPr id="18" name="Text 16"/>
           <p:cNvSpPr/>
           <p:nvPr/>
         </p:nvSpPr>
         <p:spPr>
           <a:xfrm>
-            <a:off x="118872" y="2514600"/>
+            <a:off x="118872" y="2880360"/>
             <a:ext cx="2212848" cy="164592"/>
           </a:xfrm>
           <a:prstGeom prst="rect">
@@ -33577,13 +33733,13 @@
       </p:sp>
       <p:sp>
         <p:nvSpPr>
-          <p:cNvPr id="15" name="Shape 13"/>
+          <p:cNvPr id="19" name="Shape 17"/>
           <p:cNvSpPr/>
           <p:nvPr/>
         </p:nvSpPr>
         <p:spPr>
           <a:xfrm>
-            <a:off x="118872" y="2697480"/>
+            <a:off x="118872" y="3063240"/>
             <a:ext cx="2212848" cy="0"/>
           </a:xfrm>
           <a:prstGeom prst="line">
@@ -33600,13 +33756,13 @@
       </p:sp>
       <p:sp>
         <p:nvSpPr>
-          <p:cNvPr id="16" name="Text 14"/>
+          <p:cNvPr id="20" name="Text 18"/>
           <p:cNvSpPr/>
           <p:nvPr/>
         </p:nvSpPr>
         <p:spPr>
           <a:xfrm>
-            <a:off x="118872" y="2770632"/>
+            <a:off x="118872" y="3136392"/>
             <a:ext cx="1371600" cy="182880"/>
           </a:xfrm>
           <a:prstGeom prst="rect">
@@ -33639,13 +33795,13 @@
       </p:sp>
       <p:sp>
         <p:nvSpPr>
-          <p:cNvPr id="17" name="Text 15"/>
+          <p:cNvPr id="21" name="Text 19"/>
           <p:cNvSpPr/>
           <p:nvPr/>
         </p:nvSpPr>
         <p:spPr>
           <a:xfrm>
-            <a:off x="1490472" y="2770632"/>
+            <a:off x="1490472" y="3136392"/>
             <a:ext cx="841248" cy="182880"/>
           </a:xfrm>
           <a:prstGeom prst="rect">
@@ -33670,7 +33826,7 @@
                 <a:ea typeface="Calibri" pitchFamily="34" charset="-122"/>
                 <a:cs typeface="Calibri" pitchFamily="34" charset="-120"/>
               </a:rPr>
-              <a:t>63,16%</a:t>
+              <a:t>58,78%</a:t>
             </a:r>
             <a:endParaRPr lang="en-US" sz="750" dirty="0"/>
           </a:p>
@@ -33678,13 +33834,13 @@
       </p:sp>
       <p:sp>
         <p:nvSpPr>
-          <p:cNvPr id="18" name="Text 16"/>
+          <p:cNvPr id="22" name="Text 20"/>
           <p:cNvSpPr/>
           <p:nvPr/>
         </p:nvSpPr>
         <p:spPr>
           <a:xfrm>
-            <a:off x="118872" y="2971800"/>
+            <a:off x="118872" y="3337560"/>
             <a:ext cx="1371600" cy="182880"/>
           </a:xfrm>
           <a:prstGeom prst="rect">
@@ -33717,13 +33873,13 @@
       </p:sp>
       <p:sp>
         <p:nvSpPr>
-          <p:cNvPr id="19" name="Text 17"/>
+          <p:cNvPr id="23" name="Text 21"/>
           <p:cNvSpPr/>
           <p:nvPr/>
         </p:nvSpPr>
         <p:spPr>
           <a:xfrm>
-            <a:off x="1490472" y="2971800"/>
+            <a:off x="1490472" y="3337560"/>
             <a:ext cx="841248" cy="182880"/>
           </a:xfrm>
           <a:prstGeom prst="rect">
@@ -33748,7 +33904,7 @@
                 <a:ea typeface="Calibri" pitchFamily="34" charset="-122"/>
                 <a:cs typeface="Calibri" pitchFamily="34" charset="-120"/>
               </a:rPr>
-              <a:t>28,00%</a:t>
+              <a:t>39,18%</a:t>
             </a:r>
             <a:endParaRPr lang="en-US" sz="750" dirty="0"/>
           </a:p>
@@ -33756,13 +33912,13 @@
       </p:sp>
       <p:sp>
         <p:nvSpPr>
-          <p:cNvPr id="20" name="Text 18"/>
+          <p:cNvPr id="24" name="Text 22"/>
           <p:cNvSpPr/>
           <p:nvPr/>
         </p:nvSpPr>
         <p:spPr>
           <a:xfrm>
-            <a:off x="118872" y="3172968"/>
+            <a:off x="118872" y="3538728"/>
             <a:ext cx="1371600" cy="182880"/>
           </a:xfrm>
           <a:prstGeom prst="rect">
@@ -33795,13 +33951,13 @@
       </p:sp>
       <p:sp>
         <p:nvSpPr>
-          <p:cNvPr id="21" name="Text 19"/>
+          <p:cNvPr id="25" name="Text 23"/>
           <p:cNvSpPr/>
           <p:nvPr/>
         </p:nvSpPr>
         <p:spPr>
           <a:xfrm>
-            <a:off x="1490472" y="3172968"/>
+            <a:off x="1490472" y="3538728"/>
             <a:ext cx="841248" cy="182880"/>
           </a:xfrm>
           <a:prstGeom prst="rect">
@@ -33826,7 +33982,7 @@
                 <a:ea typeface="Calibri" pitchFamily="34" charset="-122"/>
                 <a:cs typeface="Calibri" pitchFamily="34" charset="-120"/>
               </a:rPr>
-              <a:t>8,84%</a:t>
+              <a:t>2,04%</a:t>
             </a:r>
             <a:endParaRPr lang="en-US" sz="750" dirty="0"/>
           </a:p>
@@ -33834,13 +33990,13 @@
       </p:sp>
       <p:sp>
         <p:nvSpPr>
-          <p:cNvPr id="22" name="Text 20"/>
+          <p:cNvPr id="26" name="Text 24"/>
           <p:cNvSpPr/>
           <p:nvPr/>
         </p:nvSpPr>
         <p:spPr>
           <a:xfrm>
-            <a:off x="118872" y="3374136"/>
+            <a:off x="118872" y="3739896"/>
             <a:ext cx="1371600" cy="182880"/>
           </a:xfrm>
           <a:prstGeom prst="rect">
@@ -33873,13 +34029,13 @@
       </p:sp>
       <p:sp>
         <p:nvSpPr>
-          <p:cNvPr id="23" name="Text 21"/>
+          <p:cNvPr id="27" name="Text 25"/>
           <p:cNvSpPr/>
           <p:nvPr/>
         </p:nvSpPr>
         <p:spPr>
           <a:xfrm>
-            <a:off x="1490472" y="3374136"/>
+            <a:off x="1490472" y="3739896"/>
             <a:ext cx="841248" cy="182880"/>
           </a:xfrm>
           <a:prstGeom prst="rect">
@@ -33912,7 +34068,7 @@
       </p:sp>
       <p:sp>
         <p:nvSpPr>
-          <p:cNvPr id="24" name="Text 22"/>
+          <p:cNvPr id="28" name="Text 26"/>
           <p:cNvSpPr/>
           <p:nvPr/>
         </p:nvSpPr>
@@ -33951,7 +34107,7 @@
       </p:sp>
       <p:sp>
         <p:nvSpPr>
-          <p:cNvPr id="25" name="Shape 23"/>
+          <p:cNvPr id="29" name="Shape 27"/>
           <p:cNvSpPr/>
           <p:nvPr/>
         </p:nvSpPr>
@@ -33974,7 +34130,7 @@
       </p:sp>
       <p:sp>
         <p:nvSpPr>
-          <p:cNvPr id="26" name="Text 24"/>
+          <p:cNvPr id="30" name="Text 28"/>
           <p:cNvSpPr/>
           <p:nvPr/>
         </p:nvSpPr>
@@ -34030,7 +34186,7 @@
       </p:sp>
       <p:sp>
         <p:nvSpPr>
-          <p:cNvPr id="27" name="Text 25"/>
+          <p:cNvPr id="31" name="Text 29"/>
           <p:cNvSpPr/>
           <p:nvPr/>
         </p:nvSpPr>
@@ -34086,7 +34242,7 @@
       </p:sp>
       <p:sp>
         <p:nvSpPr>
-          <p:cNvPr id="28" name="Text 26"/>
+          <p:cNvPr id="32" name="Text 30"/>
           <p:cNvSpPr/>
           <p:nvPr/>
         </p:nvSpPr>
@@ -34142,7 +34298,7 @@
       </p:sp>
       <p:sp>
         <p:nvSpPr>
-          <p:cNvPr id="29" name="Text 27"/>
+          <p:cNvPr id="33" name="Text 31"/>
           <p:cNvSpPr/>
           <p:nvPr/>
         </p:nvSpPr>
@@ -34198,7 +34354,7 @@
       </p:sp>
       <p:sp>
         <p:nvSpPr>
-          <p:cNvPr id="30" name="Text 28"/>
+          <p:cNvPr id="34" name="Text 32"/>
           <p:cNvSpPr/>
           <p:nvPr/>
         </p:nvSpPr>
@@ -34254,7 +34410,7 @@
       </p:sp>
       <p:sp>
         <p:nvSpPr>
-          <p:cNvPr id="31" name="Text 29"/>
+          <p:cNvPr id="35" name="Text 33"/>
           <p:cNvSpPr/>
           <p:nvPr/>
         </p:nvSpPr>
@@ -34310,7 +34466,7 @@
       </p:sp>
       <p:sp>
         <p:nvSpPr>
-          <p:cNvPr id="32" name="Text 30"/>
+          <p:cNvPr id="36" name="Text 34"/>
           <p:cNvSpPr/>
           <p:nvPr/>
         </p:nvSpPr>
@@ -34366,7 +34522,7 @@
       </p:sp>
       <p:sp>
         <p:nvSpPr>
-          <p:cNvPr id="33" name="Text 31"/>
+          <p:cNvPr id="37" name="Text 35"/>
           <p:cNvSpPr/>
           <p:nvPr/>
         </p:nvSpPr>
@@ -34422,7 +34578,7 @@
       </p:sp>
       <p:sp>
         <p:nvSpPr>
-          <p:cNvPr id="34" name="Text 32"/>
+          <p:cNvPr id="38" name="Text 36"/>
           <p:cNvSpPr/>
           <p:nvPr/>
         </p:nvSpPr>
@@ -34478,7 +34634,7 @@
       </p:sp>
       <p:sp>
         <p:nvSpPr>
-          <p:cNvPr id="35" name="Shape 33"/>
+          <p:cNvPr id="39" name="Shape 37"/>
           <p:cNvSpPr/>
           <p:nvPr/>
         </p:nvSpPr>
@@ -34501,7 +34657,7 @@
       </p:sp>
       <p:sp>
         <p:nvSpPr>
-          <p:cNvPr id="36" name="Text 34"/>
+          <p:cNvPr id="40" name="Text 38"/>
           <p:cNvSpPr/>
           <p:nvPr/>
         </p:nvSpPr>
@@ -34540,7 +34696,7 @@
       </p:sp>
       <p:sp>
         <p:nvSpPr>
-          <p:cNvPr id="37" name="Shape 35"/>
+          <p:cNvPr id="41" name="Shape 39"/>
           <p:cNvSpPr/>
           <p:nvPr/>
         </p:nvSpPr>
@@ -34563,7 +34719,7 @@
       </p:sp>
       <p:sp>
         <p:nvSpPr>
-          <p:cNvPr id="38" name="Text 36"/>
+          <p:cNvPr id="42" name="Text 40"/>
           <p:cNvSpPr/>
           <p:nvPr/>
         </p:nvSpPr>

--- a/folletos/2026-04/pptx/FIP_VANTRUST_LIQUIDEZ_LOCAL.pptx
+++ b/folletos/2026-04/pptx/FIP_VANTRUST_LIQUIDEZ_LOCAL.pptx
@@ -6373,7 +6373,7 @@
                 <a:ea typeface="Calibri" pitchFamily="34" charset="-122"/>
                 <a:cs typeface="Calibri" pitchFamily="34" charset="-120"/>
               </a:rPr>
-              <a:t>prueba CLP</a:t>
+              <a:t>prueba 8 CLP</a:t>
             </a:r>
             <a:endParaRPr lang="en-US" sz="800" dirty="0"/>
           </a:p>

--- a/folletos/2026-04/pptx/FIP_VANTRUST_LIQUIDEZ_LOCAL.pptx
+++ b/folletos/2026-04/pptx/FIP_VANTRUST_LIQUIDEZ_LOCAL.pptx
@@ -3114,7 +3114,7 @@
                 <a:ea typeface="Calibri" pitchFamily="34" charset="-122"/>
                 <a:cs typeface="Calibri" pitchFamily="34" charset="-120"/>
               </a:rPr>
-              <a:t>prueba CLP</a:t>
+              <a:t>prueba 10 CLP</a:t>
             </a:r>
             <a:endParaRPr lang="en-US" sz="800" dirty="0"/>
           </a:p>

--- a/folletos/2026-04/pptx/FIP_VANTRUST_LIQUIDEZ_LOCAL.pptx
+++ b/folletos/2026-04/pptx/FIP_VANTRUST_LIQUIDEZ_LOCAL.pptx
@@ -3114,7 +3114,7 @@
                 <a:ea typeface="Calibri" pitchFamily="34" charset="-122"/>
                 <a:cs typeface="Calibri" pitchFamily="34" charset="-120"/>
               </a:rPr>
-              <a:t>prueba 10 CLP</a:t>
+              <a:t>prueba 11 CLP</a:t>
             </a:r>
             <a:endParaRPr lang="en-US" sz="800" dirty="0"/>
           </a:p>

--- a/folletos/2026-04/pptx/FIP_VANTRUST_LIQUIDEZ_LOCAL.pptx
+++ b/folletos/2026-04/pptx/FIP_VANTRUST_LIQUIDEZ_LOCAL.pptx
@@ -3131,7 +3131,7 @@
                 <a:ea typeface="Calibri" pitchFamily="34" charset="-122"/>
                 <a:cs typeface="Calibri" pitchFamily="34" charset="-120"/>
               </a:rPr>
-              <a:t>prueba CLP</a:t>
+              <a:t>prueba 11 CLP</a:t>
             </a:r>
             <a:endParaRPr lang="en-US" sz="800" dirty="0"/>
           </a:p>

--- a/folletos/2026-04/pptx/FIP_VANTRUST_LIQUIDEZ_LOCAL.pptx
+++ b/folletos/2026-04/pptx/FIP_VANTRUST_LIQUIDEZ_LOCAL.pptx
@@ -3131,7 +3131,7 @@
                 <a:ea typeface="Calibri" pitchFamily="34" charset="-122"/>
                 <a:cs typeface="Calibri" pitchFamily="34" charset="-120"/>
               </a:rPr>
-              <a:t>prueba 11 CLP</a:t>
+              <a:t>prueba 12 CLP</a:t>
             </a:r>
             <a:endParaRPr lang="en-US" sz="800" dirty="0"/>
           </a:p>

--- a/folletos/2026-04/pptx/FIP_VANTRUST_LIQUIDEZ_LOCAL.pptx
+++ b/folletos/2026-04/pptx/FIP_VANTRUST_LIQUIDEZ_LOCAL.pptx
@@ -3113,7 +3113,7 @@
                 <a:ea typeface="Calibri" pitchFamily="34" charset="-122"/>
                 <a:cs typeface="Calibri" pitchFamily="34" charset="-120"/>
               </a:rPr>
-              <a:t>prueba CLP</a:t>
+              <a:t>prueba 12 CLP</a:t>
             </a:r>
             <a:endParaRPr lang="en-US" sz="800" dirty="0"/>
           </a:p>

--- a/folletos/2026-04/pptx/FIP_VANTRUST_LIQUIDEZ_LOCAL.pptx
+++ b/folletos/2026-04/pptx/FIP_VANTRUST_LIQUIDEZ_LOCAL.pptx
@@ -3113,7 +3113,7 @@
                 <a:ea typeface="Calibri" pitchFamily="34" charset="-122"/>
                 <a:cs typeface="Calibri" pitchFamily="34" charset="-120"/>
               </a:rPr>
-              <a:t>prueba 12 CLP</a:t>
+              <a:t>prueba CLP</a:t>
             </a:r>
             <a:endParaRPr lang="en-US" sz="800" dirty="0"/>
           </a:p>
@@ -7404,7 +7404,7 @@
                           <a:ea typeface="Calibri" pitchFamily="34" charset="-122"/>
                           <a:cs typeface="Calibri" pitchFamily="34" charset="-120"/>
                         </a:rPr>
-                        <a:t>0.01%</a:t>
+                        <a:t>0.59%</a:t>
                       </a:r>
                       <a:endParaRPr lang="en-US" sz="500" dirty="0">
                         <a:latin typeface="Calibri" charset="0"/>
@@ -7469,7 +7469,7 @@
                           <a:ea typeface="Calibri" pitchFamily="34" charset="-122"/>
                           <a:cs typeface="Calibri" pitchFamily="34" charset="-120"/>
                         </a:rPr>
-                        <a:t>0.01%</a:t>
+                        <a:t>0.65%</a:t>
                       </a:r>
                       <a:endParaRPr lang="en-US" sz="500" dirty="0">
                         <a:latin typeface="Calibri" charset="0"/>
@@ -7534,7 +7534,7 @@
                           <a:ea typeface="Calibri" pitchFamily="34" charset="-122"/>
                           <a:cs typeface="Calibri" pitchFamily="34" charset="-120"/>
                         </a:rPr>
-                        <a:t>0.01%</a:t>
+                        <a:t>0.70%</a:t>
                       </a:r>
                       <a:endParaRPr lang="en-US" sz="500" dirty="0">
                         <a:latin typeface="Calibri" charset="0"/>
@@ -7599,7 +7599,7 @@
                           <a:ea typeface="Calibri" pitchFamily="34" charset="-122"/>
                           <a:cs typeface="Calibri" pitchFamily="34" charset="-120"/>
                         </a:rPr>
-                        <a:t>0.01%</a:t>
+                        <a:t>0.73%</a:t>
                       </a:r>
                       <a:endParaRPr lang="en-US" sz="500" dirty="0">
                         <a:latin typeface="Calibri" charset="0"/>
@@ -7664,7 +7664,7 @@
                           <a:ea typeface="Calibri" pitchFamily="34" charset="-122"/>
                           <a:cs typeface="Calibri" pitchFamily="34" charset="-120"/>
                         </a:rPr>
-                        <a:t>0.01%</a:t>
+                        <a:t>0.72%</a:t>
                       </a:r>
                       <a:endParaRPr lang="en-US" sz="500" dirty="0">
                         <a:latin typeface="Calibri" charset="0"/>
@@ -7729,7 +7729,7 @@
                           <a:ea typeface="Calibri" pitchFamily="34" charset="-122"/>
                           <a:cs typeface="Calibri" pitchFamily="34" charset="-120"/>
                         </a:rPr>
-                        <a:t>0.01%</a:t>
+                        <a:t>0.87%</a:t>
                       </a:r>
                       <a:endParaRPr lang="en-US" sz="500" dirty="0">
                         <a:latin typeface="Calibri" charset="0"/>
@@ -7859,7 +7859,7 @@
                           <a:ea typeface="Calibri" pitchFamily="34" charset="-122"/>
                           <a:cs typeface="Calibri" pitchFamily="34" charset="-120"/>
                         </a:rPr>
-                        <a:t>8.48%</a:t>
+                        <a:t>13.15%</a:t>
                       </a:r>
                       <a:endParaRPr lang="en-US" sz="500" dirty="0">
                         <a:latin typeface="Calibri" charset="0"/>
@@ -8315,7 +8315,7 @@
                           <a:ea typeface="Calibri" pitchFamily="34" charset="-122"/>
                           <a:cs typeface="Calibri" pitchFamily="34" charset="-120"/>
                         </a:rPr>
-                        <a:t>0.01%</a:t>
+                        <a:t>0.63%</a:t>
                       </a:r>
                       <a:endParaRPr lang="en-US" sz="500" dirty="0">
                         <a:latin typeface="Calibri" charset="0"/>
@@ -8380,7 +8380,7 @@
                           <a:ea typeface="Calibri" pitchFamily="34" charset="-122"/>
                           <a:cs typeface="Calibri" pitchFamily="34" charset="-120"/>
                         </a:rPr>
-                        <a:t>0.01%</a:t>
+                        <a:t>0.81%</a:t>
                       </a:r>
                       <a:endParaRPr lang="en-US" sz="500" dirty="0">
                         <a:latin typeface="Calibri" charset="0"/>
@@ -8445,7 +8445,7 @@
                           <a:ea typeface="Calibri" pitchFamily="34" charset="-122"/>
                           <a:cs typeface="Calibri" pitchFamily="34" charset="-120"/>
                         </a:rPr>
-                        <a:t>0.01%</a:t>
+                        <a:t>0.86%</a:t>
                       </a:r>
                       <a:endParaRPr lang="en-US" sz="500" dirty="0">
                         <a:latin typeface="Calibri" charset="0"/>
@@ -8510,7 +8510,7 @@
                           <a:ea typeface="Calibri" pitchFamily="34" charset="-122"/>
                           <a:cs typeface="Calibri" pitchFamily="34" charset="-120"/>
                         </a:rPr>
-                        <a:t>0.01%</a:t>
+                        <a:t>0.90%</a:t>
                       </a:r>
                       <a:endParaRPr lang="en-US" sz="500" dirty="0">
                         <a:latin typeface="Calibri" charset="0"/>
@@ -8575,7 +8575,7 @@
                           <a:ea typeface="Calibri" pitchFamily="34" charset="-122"/>
                           <a:cs typeface="Calibri" pitchFamily="34" charset="-120"/>
                         </a:rPr>
-                        <a:t>0.01%</a:t>
+                        <a:t>0.91%</a:t>
                       </a:r>
                       <a:endParaRPr lang="en-US" sz="500" dirty="0">
                         <a:latin typeface="Calibri" charset="0"/>
@@ -8640,7 +8640,7 @@
                           <a:ea typeface="Calibri" pitchFamily="34" charset="-122"/>
                           <a:cs typeface="Calibri" pitchFamily="34" charset="-120"/>
                         </a:rPr>
-                        <a:t>0.01%</a:t>
+                        <a:t>1.03%</a:t>
                       </a:r>
                       <a:endParaRPr lang="en-US" sz="500" dirty="0">
                         <a:latin typeface="Calibri" charset="0"/>
@@ -8705,7 +8705,7 @@
                           <a:ea typeface="Calibri" pitchFamily="34" charset="-122"/>
                           <a:cs typeface="Calibri" pitchFamily="34" charset="-120"/>
                         </a:rPr>
-                        <a:t>0.01%</a:t>
+                        <a:t>1.04%</a:t>
                       </a:r>
                       <a:endParaRPr lang="en-US" sz="500" dirty="0">
                         <a:latin typeface="Calibri" charset="0"/>
@@ -8770,7 +8770,7 @@
                           <a:ea typeface="Calibri" pitchFamily="34" charset="-122"/>
                           <a:cs typeface="Calibri" pitchFamily="34" charset="-120"/>
                         </a:rPr>
-                        <a:t>0.06%</a:t>
+                        <a:t>6.35%</a:t>
                       </a:r>
                       <a:endParaRPr lang="en-US" sz="500" dirty="0">
                         <a:latin typeface="Calibri" charset="0"/>
@@ -9998,7 +9998,7 @@
                           <a:ea typeface="Calibri" pitchFamily="34" charset="-122"/>
                           <a:cs typeface="Calibri" pitchFamily="34" charset="-120"/>
                         </a:rPr>
-                        <a:t>0.01%</a:t>
+                        <a:t>0.74%</a:t>
                       </a:r>
                       <a:endParaRPr lang="en-US" sz="500" dirty="0">
                         <a:latin typeface="Calibri" charset="0"/>
@@ -10063,7 +10063,7 @@
                           <a:ea typeface="Calibri" pitchFamily="34" charset="-122"/>
                           <a:cs typeface="Calibri" pitchFamily="34" charset="-120"/>
                         </a:rPr>
-                        <a:t>0.01%</a:t>
+                        <a:t>0.82%</a:t>
                       </a:r>
                       <a:endParaRPr lang="en-US" sz="500" dirty="0">
                         <a:latin typeface="Calibri" charset="0"/>
@@ -10128,7 +10128,7 @@
                           <a:ea typeface="Calibri" pitchFamily="34" charset="-122"/>
                           <a:cs typeface="Calibri" pitchFamily="34" charset="-120"/>
                         </a:rPr>
-                        <a:t>0.01%</a:t>
+                        <a:t>0.75%</a:t>
                       </a:r>
                       <a:endParaRPr lang="en-US" sz="500" dirty="0">
                         <a:latin typeface="Calibri" charset="0"/>
@@ -10193,7 +10193,7 @@
                           <a:ea typeface="Calibri" pitchFamily="34" charset="-122"/>
                           <a:cs typeface="Calibri" pitchFamily="34" charset="-120"/>
                         </a:rPr>
-                        <a:t>0.01%</a:t>
+                        <a:t>0.88%</a:t>
                       </a:r>
                       <a:endParaRPr lang="en-US" sz="500" dirty="0">
                         <a:latin typeface="Calibri" charset="0"/>
@@ -10258,7 +10258,7 @@
                           <a:ea typeface="Calibri" pitchFamily="34" charset="-122"/>
                           <a:cs typeface="Calibri" pitchFamily="34" charset="-120"/>
                         </a:rPr>
-                        <a:t>0.01%</a:t>
+                        <a:t>0.80%</a:t>
                       </a:r>
                       <a:endParaRPr lang="en-US" sz="500" dirty="0">
                         <a:latin typeface="Calibri" charset="0"/>
@@ -10323,7 +10323,7 @@
                           <a:ea typeface="Calibri" pitchFamily="34" charset="-122"/>
                           <a:cs typeface="Calibri" pitchFamily="34" charset="-120"/>
                         </a:rPr>
-                        <a:t>0.01%</a:t>
+                        <a:t>0.82%</a:t>
                       </a:r>
                       <a:endParaRPr lang="en-US" sz="500" dirty="0">
                         <a:latin typeface="Calibri" charset="0"/>
@@ -10388,7 +10388,7 @@
                           <a:ea typeface="Calibri" pitchFamily="34" charset="-122"/>
                           <a:cs typeface="Calibri" pitchFamily="34" charset="-120"/>
                         </a:rPr>
-                        <a:t>0.01%</a:t>
+                        <a:t>0.76%</a:t>
                       </a:r>
                       <a:endParaRPr lang="en-US" sz="500" dirty="0">
                         <a:latin typeface="Calibri" charset="0"/>
@@ -10453,7 +10453,7 @@
                           <a:ea typeface="Calibri" pitchFamily="34" charset="-122"/>
                           <a:cs typeface="Calibri" pitchFamily="34" charset="-120"/>
                         </a:rPr>
-                        <a:t>0.01%</a:t>
+                        <a:t>0.68%</a:t>
                       </a:r>
                       <a:endParaRPr lang="en-US" sz="500" dirty="0">
                         <a:latin typeface="Calibri" charset="0"/>
@@ -10518,7 +10518,7 @@
                           <a:ea typeface="Calibri" pitchFamily="34" charset="-122"/>
                           <a:cs typeface="Calibri" pitchFamily="34" charset="-120"/>
                         </a:rPr>
-                        <a:t>0.01%</a:t>
+                        <a:t>0.67%</a:t>
                       </a:r>
                       <a:endParaRPr lang="en-US" sz="500" dirty="0">
                         <a:latin typeface="Calibri" charset="0"/>
@@ -10583,7 +10583,7 @@
                           <a:ea typeface="Calibri" pitchFamily="34" charset="-122"/>
                           <a:cs typeface="Calibri" pitchFamily="34" charset="-120"/>
                         </a:rPr>
-                        <a:t>0.01%</a:t>
+                        <a:t>0.62%</a:t>
                       </a:r>
                       <a:endParaRPr lang="en-US" sz="500" dirty="0">
                         <a:latin typeface="Calibri" charset="0"/>
@@ -10713,7 +10713,7 @@
                           <a:ea typeface="Calibri" pitchFamily="34" charset="-122"/>
                           <a:cs typeface="Calibri" pitchFamily="34" charset="-120"/>
                         </a:rPr>
-                        <a:t>7.57%</a:t>
+                        <a:t>15.86%</a:t>
                       </a:r>
                       <a:endParaRPr lang="en-US" sz="500" dirty="0">
                         <a:latin typeface="Calibri" charset="0"/>
@@ -10899,7 +10899,7 @@
                           <a:ea typeface="Calibri" pitchFamily="34" charset="-122"/>
                           <a:cs typeface="Calibri" pitchFamily="34" charset="-120"/>
                         </a:rPr>
-                        <a:t>0.01%</a:t>
+                        <a:t>1.10%</a:t>
                       </a:r>
                       <a:endParaRPr lang="en-US" sz="500" dirty="0">
                         <a:latin typeface="Calibri" charset="0"/>
@@ -10964,7 +10964,7 @@
                           <a:ea typeface="Calibri" pitchFamily="34" charset="-122"/>
                           <a:cs typeface="Calibri" pitchFamily="34" charset="-120"/>
                         </a:rPr>
-                        <a:t>0.01%</a:t>
+                        <a:t>0.81%</a:t>
                       </a:r>
                       <a:endParaRPr lang="en-US" sz="500" dirty="0">
                         <a:latin typeface="Calibri" charset="0"/>
@@ -11029,7 +11029,7 @@
                           <a:ea typeface="Calibri" pitchFamily="34" charset="-122"/>
                           <a:cs typeface="Calibri" pitchFamily="34" charset="-120"/>
                         </a:rPr>
-                        <a:t>0.01%</a:t>
+                        <a:t>1.06%</a:t>
                       </a:r>
                       <a:endParaRPr lang="en-US" sz="500" dirty="0">
                         <a:latin typeface="Calibri" charset="0"/>
@@ -11094,7 +11094,7 @@
                           <a:ea typeface="Calibri" pitchFamily="34" charset="-122"/>
                           <a:cs typeface="Calibri" pitchFamily="34" charset="-120"/>
                         </a:rPr>
-                        <a:t>0.01%</a:t>
+                        <a:t>1.00%</a:t>
                       </a:r>
                       <a:endParaRPr lang="en-US" sz="500" dirty="0">
                         <a:latin typeface="Calibri" charset="0"/>
@@ -11159,7 +11159,7 @@
                           <a:ea typeface="Calibri" pitchFamily="34" charset="-122"/>
                           <a:cs typeface="Calibri" pitchFamily="34" charset="-120"/>
                         </a:rPr>
-                        <a:t>0.01%</a:t>
+                        <a:t>1.15%</a:t>
                       </a:r>
                       <a:endParaRPr lang="en-US" sz="500" dirty="0">
                         <a:latin typeface="Calibri" charset="0"/>
@@ -11224,7 +11224,7 @@
                           <a:ea typeface="Calibri" pitchFamily="34" charset="-122"/>
                           <a:cs typeface="Calibri" pitchFamily="34" charset="-120"/>
                         </a:rPr>
-                        <a:t>0.01%</a:t>
+                        <a:t>1.02%</a:t>
                       </a:r>
                       <a:endParaRPr lang="en-US" sz="500" dirty="0">
                         <a:latin typeface="Calibri" charset="0"/>
@@ -11289,7 +11289,7 @@
                           <a:ea typeface="Calibri" pitchFamily="34" charset="-122"/>
                           <a:cs typeface="Calibri" pitchFamily="34" charset="-120"/>
                         </a:rPr>
-                        <a:t>0.01%</a:t>
+                        <a:t>1.10%</a:t>
                       </a:r>
                       <a:endParaRPr lang="en-US" sz="500" dirty="0">
                         <a:latin typeface="Calibri" charset="0"/>
@@ -11354,7 +11354,7 @@
                           <a:ea typeface="Calibri" pitchFamily="34" charset="-122"/>
                           <a:cs typeface="Calibri" pitchFamily="34" charset="-120"/>
                         </a:rPr>
-                        <a:t>0.01%</a:t>
+                        <a:t>1.08%</a:t>
                       </a:r>
                       <a:endParaRPr lang="en-US" sz="500" dirty="0">
                         <a:latin typeface="Calibri" charset="0"/>
@@ -11419,7 +11419,7 @@
                           <a:ea typeface="Calibri" pitchFamily="34" charset="-122"/>
                           <a:cs typeface="Calibri" pitchFamily="34" charset="-120"/>
                         </a:rPr>
-                        <a:t>0.01%</a:t>
+                        <a:t>0.94%</a:t>
                       </a:r>
                       <a:endParaRPr lang="en-US" sz="500" dirty="0">
                         <a:latin typeface="Calibri" charset="0"/>
@@ -11484,7 +11484,7 @@
                           <a:ea typeface="Calibri" pitchFamily="34" charset="-122"/>
                           <a:cs typeface="Calibri" pitchFamily="34" charset="-120"/>
                         </a:rPr>
-                        <a:t>0.01%</a:t>
+                        <a:t>0.97%</a:t>
                       </a:r>
                       <a:endParaRPr lang="en-US" sz="500" dirty="0">
                         <a:latin typeface="Calibri" charset="0"/>
@@ -11549,7 +11549,7 @@
                           <a:ea typeface="Calibri" pitchFamily="34" charset="-122"/>
                           <a:cs typeface="Calibri" pitchFamily="34" charset="-120"/>
                         </a:rPr>
-                        <a:t>0.01%</a:t>
+                        <a:t>0.88%</a:t>
                       </a:r>
                       <a:endParaRPr lang="en-US" sz="500" dirty="0">
                         <a:latin typeface="Calibri" charset="0"/>
@@ -11614,7 +11614,7 @@
                           <a:ea typeface="Calibri" pitchFamily="34" charset="-122"/>
                           <a:cs typeface="Calibri" pitchFamily="34" charset="-120"/>
                         </a:rPr>
-                        <a:t>0.01%</a:t>
+                        <a:t>0.84%</a:t>
                       </a:r>
                       <a:endParaRPr lang="en-US" sz="500" dirty="0">
                         <a:latin typeface="Calibri" charset="0"/>
@@ -11679,7 +11679,7 @@
                           <a:ea typeface="Calibri" pitchFamily="34" charset="-122"/>
                           <a:cs typeface="Calibri" pitchFamily="34" charset="-120"/>
                         </a:rPr>
-                        <a:t>0.12%</a:t>
+                        <a:t>12.64%</a:t>
                       </a:r>
                       <a:endParaRPr lang="en-US" sz="500" dirty="0">
                         <a:latin typeface="Calibri" charset="0"/>
@@ -12907,7 +12907,7 @@
                           <a:ea typeface="Calibri" pitchFamily="34" charset="-122"/>
                           <a:cs typeface="Calibri" pitchFamily="34" charset="-120"/>
                         </a:rPr>
-                        <a:t>0.01%</a:t>
+                        <a:t>0.51%</a:t>
                       </a:r>
                       <a:endParaRPr lang="en-US" sz="500" dirty="0">
                         <a:latin typeface="Calibri" charset="0"/>
@@ -12972,7 +12972,7 @@
                           <a:ea typeface="Calibri" pitchFamily="34" charset="-122"/>
                           <a:cs typeface="Calibri" pitchFamily="34" charset="-120"/>
                         </a:rPr>
-                        <a:t>0.00%</a:t>
+                        <a:t>0.45%</a:t>
                       </a:r>
                       <a:endParaRPr lang="en-US" sz="500" dirty="0">
                         <a:latin typeface="Calibri" charset="0"/>
@@ -13037,7 +13037,7 @@
                           <a:ea typeface="Calibri" pitchFamily="34" charset="-122"/>
                           <a:cs typeface="Calibri" pitchFamily="34" charset="-120"/>
                         </a:rPr>
-                        <a:t>0.00%</a:t>
+                        <a:t>0.47%</a:t>
                       </a:r>
                       <a:endParaRPr lang="en-US" sz="500" dirty="0">
                         <a:latin typeface="Calibri" charset="0"/>
@@ -13102,7 +13102,7 @@
                           <a:ea typeface="Calibri" pitchFamily="34" charset="-122"/>
                           <a:cs typeface="Calibri" pitchFamily="34" charset="-120"/>
                         </a:rPr>
-                        <a:t>0.00%</a:t>
+                        <a:t>0.42%</a:t>
                       </a:r>
                       <a:endParaRPr lang="en-US" sz="500" dirty="0">
                         <a:latin typeface="Calibri" charset="0"/>
@@ -13167,7 +13167,7 @@
                           <a:ea typeface="Calibri" pitchFamily="34" charset="-122"/>
                           <a:cs typeface="Calibri" pitchFamily="34" charset="-120"/>
                         </a:rPr>
-                        <a:t>0.00%</a:t>
+                        <a:t>0.37%</a:t>
                       </a:r>
                       <a:endParaRPr lang="en-US" sz="500" dirty="0">
                         <a:latin typeface="Calibri" charset="0"/>
@@ -13232,7 +13232,7 @@
                           <a:ea typeface="Calibri" pitchFamily="34" charset="-122"/>
                           <a:cs typeface="Calibri" pitchFamily="34" charset="-120"/>
                         </a:rPr>
-                        <a:t>0.00%</a:t>
+                        <a:t>0.36%</a:t>
                       </a:r>
                       <a:endParaRPr lang="en-US" sz="500" dirty="0">
                         <a:latin typeface="Calibri" charset="0"/>
@@ -13297,7 +13297,7 @@
                           <a:ea typeface="Calibri" pitchFamily="34" charset="-122"/>
                           <a:cs typeface="Calibri" pitchFamily="34" charset="-120"/>
                         </a:rPr>
-                        <a:t>0.00%</a:t>
+                        <a:t>0.36%</a:t>
                       </a:r>
                       <a:endParaRPr lang="en-US" sz="500" dirty="0">
                         <a:latin typeface="Calibri" charset="0"/>
@@ -13362,7 +13362,7 @@
                           <a:ea typeface="Calibri" pitchFamily="34" charset="-122"/>
                           <a:cs typeface="Calibri" pitchFamily="34" charset="-120"/>
                         </a:rPr>
-                        <a:t>0.00%</a:t>
+                        <a:t>0.34%</a:t>
                       </a:r>
                       <a:endParaRPr lang="en-US" sz="500" dirty="0">
                         <a:latin typeface="Calibri" charset="0"/>
@@ -13427,7 +13427,7 @@
                           <a:ea typeface="Calibri" pitchFamily="34" charset="-122"/>
                           <a:cs typeface="Calibri" pitchFamily="34" charset="-120"/>
                         </a:rPr>
-                        <a:t>0.00%</a:t>
+                        <a:t>0.34%</a:t>
                       </a:r>
                       <a:endParaRPr lang="en-US" sz="500" dirty="0">
                         <a:latin typeface="Calibri" charset="0"/>
@@ -13492,7 +13492,7 @@
                           <a:ea typeface="Calibri" pitchFamily="34" charset="-122"/>
                           <a:cs typeface="Calibri" pitchFamily="34" charset="-120"/>
                         </a:rPr>
-                        <a:t>0.00%</a:t>
+                        <a:t>0.32%</a:t>
                       </a:r>
                       <a:endParaRPr lang="en-US" sz="500" dirty="0">
                         <a:latin typeface="Calibri" charset="0"/>
@@ -13622,7 +13622,7 @@
                           <a:ea typeface="Calibri" pitchFamily="34" charset="-122"/>
                           <a:cs typeface="Calibri" pitchFamily="34" charset="-120"/>
                         </a:rPr>
-                        <a:t>-2.95%</a:t>
+                        <a:t>0.90%</a:t>
                       </a:r>
                       <a:endParaRPr lang="en-US" sz="500" dirty="0">
                         <a:latin typeface="Calibri" charset="0"/>
@@ -13808,7 +13808,7 @@
                           <a:ea typeface="Calibri" pitchFamily="34" charset="-122"/>
                           <a:cs typeface="Calibri" pitchFamily="34" charset="-120"/>
                         </a:rPr>
-                        <a:t>0.01%</a:t>
+                        <a:t>0.85%</a:t>
                       </a:r>
                       <a:endParaRPr lang="en-US" sz="500" dirty="0">
                         <a:latin typeface="Calibri" charset="0"/>
@@ -13873,7 +13873,7 @@
                           <a:ea typeface="Calibri" pitchFamily="34" charset="-122"/>
                           <a:cs typeface="Calibri" pitchFamily="34" charset="-120"/>
                         </a:rPr>
-                        <a:t>0.01%</a:t>
+                        <a:t>0.68%</a:t>
                       </a:r>
                       <a:endParaRPr lang="en-US" sz="500" dirty="0">
                         <a:latin typeface="Calibri" charset="0"/>
@@ -13938,7 +13938,7 @@
                           <a:ea typeface="Calibri" pitchFamily="34" charset="-122"/>
                           <a:cs typeface="Calibri" pitchFamily="34" charset="-120"/>
                         </a:rPr>
-                        <a:t>0.01%</a:t>
+                        <a:t>0.59%</a:t>
                       </a:r>
                       <a:endParaRPr lang="en-US" sz="500" dirty="0">
                         <a:latin typeface="Calibri" charset="0"/>
@@ -14003,7 +14003,7 @@
                           <a:ea typeface="Calibri" pitchFamily="34" charset="-122"/>
                           <a:cs typeface="Calibri" pitchFamily="34" charset="-120"/>
                         </a:rPr>
-                        <a:t>0.01%</a:t>
+                        <a:t>0.57%</a:t>
                       </a:r>
                       <a:endParaRPr lang="en-US" sz="500" dirty="0">
                         <a:latin typeface="Calibri" charset="0"/>
@@ -14068,7 +14068,7 @@
                           <a:ea typeface="Calibri" pitchFamily="34" charset="-122"/>
                           <a:cs typeface="Calibri" pitchFamily="34" charset="-120"/>
                         </a:rPr>
-                        <a:t>0.01%</a:t>
+                        <a:t>0.55%</a:t>
                       </a:r>
                       <a:endParaRPr lang="en-US" sz="500" dirty="0">
                         <a:latin typeface="Calibri" charset="0"/>
@@ -14133,7 +14133,7 @@
                           <a:ea typeface="Calibri" pitchFamily="34" charset="-122"/>
                           <a:cs typeface="Calibri" pitchFamily="34" charset="-120"/>
                         </a:rPr>
-                        <a:t>0.01%</a:t>
+                        <a:t>0.53%</a:t>
                       </a:r>
                       <a:endParaRPr lang="en-US" sz="500" dirty="0">
                         <a:latin typeface="Calibri" charset="0"/>
@@ -14198,7 +14198,7 @@
                           <a:ea typeface="Calibri" pitchFamily="34" charset="-122"/>
                           <a:cs typeface="Calibri" pitchFamily="34" charset="-120"/>
                         </a:rPr>
-                        <a:t>0.01%</a:t>
+                        <a:t>0.52%</a:t>
                       </a:r>
                       <a:endParaRPr lang="en-US" sz="500" dirty="0">
                         <a:latin typeface="Calibri" charset="0"/>
@@ -14263,7 +14263,7 @@
                           <a:ea typeface="Calibri" pitchFamily="34" charset="-122"/>
                           <a:cs typeface="Calibri" pitchFamily="34" charset="-120"/>
                         </a:rPr>
-                        <a:t>0.01%</a:t>
+                        <a:t>0.64%</a:t>
                       </a:r>
                       <a:endParaRPr lang="en-US" sz="500" dirty="0">
                         <a:latin typeface="Calibri" charset="0"/>
@@ -14328,7 +14328,7 @@
                           <a:ea typeface="Calibri" pitchFamily="34" charset="-122"/>
                           <a:cs typeface="Calibri" pitchFamily="34" charset="-120"/>
                         </a:rPr>
-                        <a:t>0.01%</a:t>
+                        <a:t>0.55%</a:t>
                       </a:r>
                       <a:endParaRPr lang="en-US" sz="500" dirty="0">
                         <a:latin typeface="Calibri" charset="0"/>
@@ -14393,7 +14393,7 @@
                           <a:ea typeface="Calibri" pitchFamily="34" charset="-122"/>
                           <a:cs typeface="Calibri" pitchFamily="34" charset="-120"/>
                         </a:rPr>
-                        <a:t>0.00%</a:t>
+                        <a:t>0.43%</a:t>
                       </a:r>
                       <a:endParaRPr lang="en-US" sz="500" dirty="0">
                         <a:latin typeface="Calibri" charset="0"/>
@@ -14458,7 +14458,7 @@
                           <a:ea typeface="Calibri" pitchFamily="34" charset="-122"/>
                           <a:cs typeface="Calibri" pitchFamily="34" charset="-120"/>
                         </a:rPr>
-                        <a:t>0.01%</a:t>
+                        <a:t>0.53%</a:t>
                       </a:r>
                       <a:endParaRPr lang="en-US" sz="500" dirty="0">
                         <a:latin typeface="Calibri" charset="0"/>
@@ -14523,7 +14523,7 @@
                           <a:ea typeface="Calibri" pitchFamily="34" charset="-122"/>
                           <a:cs typeface="Calibri" pitchFamily="34" charset="-120"/>
                         </a:rPr>
-                        <a:t>0.00%</a:t>
+                        <a:t>0.43%</a:t>
                       </a:r>
                       <a:endParaRPr lang="en-US" sz="500" dirty="0">
                         <a:latin typeface="Calibri" charset="0"/>
@@ -14588,7 +14588,7 @@
                           <a:ea typeface="Calibri" pitchFamily="34" charset="-122"/>
                           <a:cs typeface="Calibri" pitchFamily="34" charset="-120"/>
                         </a:rPr>
-                        <a:t>0.07%</a:t>
+                        <a:t>7.08%</a:t>
                       </a:r>
                       <a:endParaRPr lang="en-US" sz="500" dirty="0">
                         <a:latin typeface="Calibri" charset="0"/>
@@ -16717,7 +16717,7 @@
                           <a:ea typeface="Calibri" pitchFamily="34" charset="-122"/>
                           <a:cs typeface="Calibri" pitchFamily="34" charset="-120"/>
                         </a:rPr>
-                        <a:t>0.00%</a:t>
+                        <a:t>0.41%</a:t>
                       </a:r>
                       <a:endParaRPr lang="en-US" sz="500" dirty="0">
                         <a:latin typeface="Calibri" charset="0"/>
@@ -16782,7 +16782,7 @@
                           <a:ea typeface="Calibri" pitchFamily="34" charset="-122"/>
                           <a:cs typeface="Calibri" pitchFamily="34" charset="-120"/>
                         </a:rPr>
-                        <a:t>0.00%</a:t>
+                        <a:t>0.40%</a:t>
                       </a:r>
                       <a:endParaRPr lang="en-US" sz="500" dirty="0">
                         <a:latin typeface="Calibri" charset="0"/>
@@ -16847,7 +16847,7 @@
                           <a:ea typeface="Calibri" pitchFamily="34" charset="-122"/>
                           <a:cs typeface="Calibri" pitchFamily="34" charset="-120"/>
                         </a:rPr>
-                        <a:t>0.01%</a:t>
+                        <a:t>0.51%</a:t>
                       </a:r>
                       <a:endParaRPr lang="en-US" sz="500" dirty="0">
                         <a:latin typeface="Calibri" charset="0"/>
@@ -16912,7 +16912,7 @@
                           <a:ea typeface="Calibri" pitchFamily="34" charset="-122"/>
                           <a:cs typeface="Calibri" pitchFamily="34" charset="-120"/>
                         </a:rPr>
-                        <a:t>0.01%</a:t>
+                        <a:t>0.86%</a:t>
                       </a:r>
                       <a:endParaRPr lang="en-US" sz="500" dirty="0">
                         <a:latin typeface="Calibri" charset="0"/>
@@ -16977,7 +16977,7 @@
                           <a:ea typeface="Calibri" pitchFamily="34" charset="-122"/>
                           <a:cs typeface="Calibri" pitchFamily="34" charset="-120"/>
                         </a:rPr>
-                        <a:t>0.01%</a:t>
+                        <a:t>0.61%</a:t>
                       </a:r>
                       <a:endParaRPr lang="en-US" sz="500" dirty="0">
                         <a:latin typeface="Calibri" charset="0"/>
@@ -17042,7 +17042,7 @@
                           <a:ea typeface="Calibri" pitchFamily="34" charset="-122"/>
                           <a:cs typeface="Calibri" pitchFamily="34" charset="-120"/>
                         </a:rPr>
-                        <a:t>0.01%</a:t>
+                        <a:t>0.57%</a:t>
                       </a:r>
                       <a:endParaRPr lang="en-US" sz="500" dirty="0">
                         <a:latin typeface="Calibri" charset="0"/>
@@ -17107,7 +17107,7 @@
                           <a:ea typeface="Calibri" pitchFamily="34" charset="-122"/>
                           <a:cs typeface="Calibri" pitchFamily="34" charset="-120"/>
                         </a:rPr>
-                        <a:t>0.01%</a:t>
+                        <a:t>0.55%</a:t>
                       </a:r>
                       <a:endParaRPr lang="en-US" sz="500" dirty="0">
                         <a:latin typeface="Calibri" charset="0"/>
@@ -17497,7 +17497,7 @@
                           <a:ea typeface="Calibri" pitchFamily="34" charset="-122"/>
                           <a:cs typeface="Calibri" pitchFamily="34" charset="-120"/>
                         </a:rPr>
-                        <a:t>3.12%</a:t>
+                        <a:t>7.18%</a:t>
                       </a:r>
                       <a:endParaRPr lang="en-US" sz="500" dirty="0">
                         <a:latin typeface="Calibri" charset="0"/>

--- a/folletos/2026-04/pptx/FIP_VANTRUST_LIQUIDEZ_LOCAL.pptx
+++ b/folletos/2026-04/pptx/FIP_VANTRUST_LIQUIDEZ_LOCAL.pptx
@@ -3113,7 +3113,7 @@
                 <a:ea typeface="Calibri" pitchFamily="34" charset="-122"/>
                 <a:cs typeface="Calibri" pitchFamily="34" charset="-120"/>
               </a:rPr>
-              <a:t>prueba CLP</a:t>
+              <a:t>prueba 13 CLP</a:t>
             </a:r>
             <a:endParaRPr lang="en-US" sz="800" dirty="0"/>
           </a:p>

--- a/folletos/2026-04/pptx/FIP_VANTRUST_LIQUIDEZ_LOCAL.pptx
+++ b/folletos/2026-04/pptx/FIP_VANTRUST_LIQUIDEZ_LOCAL.pptx
@@ -3797,7 +3797,7 @@
                 <a:ea typeface="Calibri" pitchFamily="34" charset="-122"/>
                 <a:cs typeface="Calibri" pitchFamily="34" charset="-120"/>
               </a:rPr>
-              <a:t>prueba CLP</a:t>
+              <a:t>prueba 13 CLP</a:t>
             </a:r>
             <a:endParaRPr lang="en-US" sz="800" dirty="0"/>
           </a:p>

--- a/folletos/2026-04/pptx/FIP_VANTRUST_LIQUIDEZ_LOCAL.pptx
+++ b/folletos/2026-04/pptx/FIP_VANTRUST_LIQUIDEZ_LOCAL.pptx
@@ -489,7 +489,7 @@
                   <c:v>133.81</c:v>
                 </c:pt>
                 <c:pt idx="47">
-                  <c:v>134.31</c:v>
+                  <c:v>99.77</c:v>
                 </c:pt>
               </c:numCache>
             </c:numRef>
@@ -1245,7 +1245,7 @@
                   <c:v>126.02</c:v>
                 </c:pt>
                 <c:pt idx="47">
-                  <c:v>126.35</c:v>
+                  <c:v/>
                 </c:pt>
               </c:numCache>
             </c:numRef>
@@ -1327,7 +1327,7 @@
         <c:axId val="2094734552"/>
         <c:scaling>
           <c:orientation val="minMax"/>
-          <c:min val="97"/>
+          <c:min val="96"/>
         </c:scaling>
         <c:delete val="0"/>
         <c:axPos val="l"/>
@@ -3797,7 +3797,7 @@
                 <a:ea typeface="Calibri" pitchFamily="34" charset="-122"/>
                 <a:cs typeface="Calibri" pitchFamily="34" charset="-120"/>
               </a:rPr>
-              <a:t>prueba 13 CLP</a:t>
+              <a:t>prueba CLP</a:t>
             </a:r>
             <a:endParaRPr lang="en-US" sz="800" dirty="0"/>
           </a:p>
@@ -4446,7 +4446,7 @@
                           <a:ea typeface="Calibri" pitchFamily="34" charset="-122"/>
                           <a:cs typeface="Calibri" pitchFamily="34" charset="-120"/>
                         </a:rPr>
-                        <a:t>0.38%</a:t>
+                        <a:t>-25.44%</a:t>
                       </a:r>
                       <a:endParaRPr lang="en-US" sz="750" dirty="0">
                         <a:latin typeface="Calibri" charset="0"/>
@@ -4514,7 +4514,7 @@
                           <a:ea typeface="Calibri" pitchFamily="34" charset="-122"/>
                           <a:cs typeface="Calibri" pitchFamily="34" charset="-120"/>
                         </a:rPr>
-                        <a:t>1.13%</a:t>
+                        <a:t>-24.88%</a:t>
                       </a:r>
                       <a:endParaRPr lang="en-US" sz="750" dirty="0">
                         <a:latin typeface="Calibri" charset="0"/>
@@ -4582,7 +4582,7 @@
                           <a:ea typeface="Calibri" pitchFamily="34" charset="-122"/>
                           <a:cs typeface="Calibri" pitchFamily="34" charset="-120"/>
                         </a:rPr>
-                        <a:t>2.33%</a:t>
+                        <a:t>-23.98%</a:t>
                       </a:r>
                       <a:endParaRPr lang="en-US" sz="750" dirty="0">
                         <a:latin typeface="Calibri" charset="0"/>
@@ -4650,7 +4650,7 @@
                           <a:ea typeface="Calibri" pitchFamily="34" charset="-122"/>
                           <a:cs typeface="Calibri" pitchFamily="34" charset="-120"/>
                         </a:rPr>
-                        <a:t>4.90%</a:t>
+                        <a:t>-22.07%</a:t>
                       </a:r>
                       <a:endParaRPr lang="en-US" sz="750" dirty="0">
                         <a:latin typeface="Calibri" charset="0"/>
@@ -4718,7 +4718,7 @@
                           <a:ea typeface="Calibri" pitchFamily="34" charset="-122"/>
                           <a:cs typeface="Calibri" pitchFamily="34" charset="-120"/>
                         </a:rPr>
-                        <a:t>3.39%</a:t>
+                        <a:t>-74.63%</a:t>
                       </a:r>
                       <a:endParaRPr lang="en-US" sz="750" dirty="0">
                         <a:latin typeface="Calibri" charset="0"/>
@@ -4856,7 +4856,7 @@
                           <a:ea typeface="Calibri" pitchFamily="34" charset="-122"/>
                           <a:cs typeface="Calibri" pitchFamily="34" charset="-120"/>
                         </a:rPr>
-                        <a:t>0.26%</a:t>
+                        <a:t>-100.00%</a:t>
                       </a:r>
                       <a:endParaRPr lang="en-US" sz="750" dirty="0">
                         <a:latin typeface="Calibri" charset="0"/>
@@ -4924,7 +4924,7 @@
                           <a:ea typeface="Calibri" pitchFamily="34" charset="-122"/>
                           <a:cs typeface="Calibri" pitchFamily="34" charset="-120"/>
                         </a:rPr>
-                        <a:t>0.77%</a:t>
+                        <a:t>-100.00%</a:t>
                       </a:r>
                       <a:endParaRPr lang="en-US" sz="750" dirty="0">
                         <a:latin typeface="Calibri" charset="0"/>
@@ -4992,7 +4992,7 @@
                           <a:ea typeface="Calibri" pitchFamily="34" charset="-122"/>
                           <a:cs typeface="Calibri" pitchFamily="34" charset="-120"/>
                         </a:rPr>
-                        <a:t>1.62%</a:t>
+                        <a:t>-100.00%</a:t>
                       </a:r>
                       <a:endParaRPr lang="en-US" sz="750" dirty="0">
                         <a:latin typeface="Calibri" charset="0"/>
@@ -5060,7 +5060,7 @@
                           <a:ea typeface="Calibri" pitchFamily="34" charset="-122"/>
                           <a:cs typeface="Calibri" pitchFamily="34" charset="-120"/>
                         </a:rPr>
-                        <a:t>3.43%</a:t>
+                        <a:t>-100.00%</a:t>
                       </a:r>
                       <a:endParaRPr lang="en-US" sz="750" dirty="0">
                         <a:latin typeface="Calibri" charset="0"/>
@@ -5128,7 +5128,7 @@
                           <a:ea typeface="Calibri" pitchFamily="34" charset="-122"/>
                           <a:cs typeface="Calibri" pitchFamily="34" charset="-120"/>
                         </a:rPr>
-                        <a:t>2.32%</a:t>
+                        <a:t>-300.00%</a:t>
                       </a:r>
                       <a:endParaRPr lang="en-US" sz="750" dirty="0">
                         <a:latin typeface="Calibri" charset="0"/>
@@ -6711,7 +6711,7 @@
                           <a:ea typeface="Calibri" pitchFamily="34" charset="-122"/>
                           <a:cs typeface="Calibri" pitchFamily="34" charset="-120"/>
                         </a:rPr>
-                        <a:t>2022</a:t>
+                        <a:t>2013</a:t>
                       </a:r>
                       <a:endParaRPr lang="en-US" sz="500" dirty="0">
                         <a:latin typeface="Calibri" charset="0"/>
@@ -6832,6 +6832,983 @@
                       <a:pPr algn="ctr" indent="0" marL="0">
                         <a:buNone/>
                       </a:pPr>
+                      <a:r>
+                        <a:rPr lang="en-US" sz="500" dirty="0">
+                          <a:solidFill>
+                            <a:srgbClr val="777777"/>
+                          </a:solidFill>
+                          <a:latin typeface="Calibri" pitchFamily="34" charset="0"/>
+                          <a:ea typeface="Calibri" pitchFamily="34" charset="-122"/>
+                          <a:cs typeface="Calibri" pitchFamily="34" charset="-120"/>
+                        </a:rPr>
+                        <a:t>0.47%</a:t>
+                      </a:r>
+                      <a:endParaRPr lang="en-US" sz="500" dirty="0">
+                        <a:latin typeface="Calibri" charset="0"/>
+                        <a:ea typeface="Calibri" charset="0"/>
+                        <a:cs typeface="Calibri" charset="0"/>
+                      </a:endParaRPr>
+                    </a:p>
+                  </a:txBody>
+                  <a:tcPr marL="91440" marR="91440" marT="45720" marB="45720">
+                    <a:lnL w="2540" cap="flat" cmpd="sng" algn="ctr">
+                      <a:solidFill>
+                        <a:srgbClr val="EEEEEE"/>
+                      </a:solidFill>
+                      <a:prstDash val="solid"/>
+                      <a:round/>
+                      <a:headEnd type="none" w="med" len="med"/>
+                      <a:tailEnd type="none" w="med" len="med"/>
+                    </a:lnL>
+                    <a:lnR w="2540" cap="flat" cmpd="sng" algn="ctr">
+                      <a:solidFill>
+                        <a:srgbClr val="EEEEEE"/>
+                      </a:solidFill>
+                      <a:prstDash val="solid"/>
+                      <a:round/>
+                      <a:headEnd type="none" w="med" len="med"/>
+                      <a:tailEnd type="none" w="med" len="med"/>
+                    </a:lnR>
+                    <a:lnT w="2540" cap="flat" cmpd="sng" algn="ctr">
+                      <a:solidFill>
+                        <a:srgbClr val="EEEEEE"/>
+                      </a:solidFill>
+                      <a:prstDash val="solid"/>
+                      <a:round/>
+                      <a:headEnd type="none" w="med" len="med"/>
+                      <a:tailEnd type="none" w="med" len="med"/>
+                    </a:lnT>
+                    <a:lnB w="2540" cap="flat" cmpd="sng" algn="ctr">
+                      <a:solidFill>
+                        <a:srgbClr val="EEEEEE"/>
+                      </a:solidFill>
+                      <a:prstDash val="solid"/>
+                      <a:round/>
+                      <a:headEnd type="none" w="med" len="med"/>
+                      <a:tailEnd type="none" w="med" len="med"/>
+                    </a:lnB>
+                  </a:tcPr>
+                </a:tc>
+                <a:tc>
+                  <a:txBody>
+                    <a:bodyPr/>
+                    <a:lstStyle/>
+                    <a:p>
+                      <a:pPr algn="ctr" indent="0" marL="0">
+                        <a:buNone/>
+                      </a:pPr>
+                      <a:r>
+                        <a:rPr lang="en-US" sz="500" dirty="0">
+                          <a:solidFill>
+                            <a:srgbClr val="777777"/>
+                          </a:solidFill>
+                          <a:latin typeface="Calibri" pitchFamily="34" charset="0"/>
+                          <a:ea typeface="Calibri" pitchFamily="34" charset="-122"/>
+                          <a:cs typeface="Calibri" pitchFamily="34" charset="-120"/>
+                        </a:rPr>
+                        <a:t>0.39%</a:t>
+                      </a:r>
+                      <a:endParaRPr lang="en-US" sz="500" dirty="0">
+                        <a:latin typeface="Calibri" charset="0"/>
+                        <a:ea typeface="Calibri" charset="0"/>
+                        <a:cs typeface="Calibri" charset="0"/>
+                      </a:endParaRPr>
+                    </a:p>
+                  </a:txBody>
+                  <a:tcPr marL="91440" marR="91440" marT="45720" marB="45720">
+                    <a:lnL w="2540" cap="flat" cmpd="sng" algn="ctr">
+                      <a:solidFill>
+                        <a:srgbClr val="EEEEEE"/>
+                      </a:solidFill>
+                      <a:prstDash val="solid"/>
+                      <a:round/>
+                      <a:headEnd type="none" w="med" len="med"/>
+                      <a:tailEnd type="none" w="med" len="med"/>
+                    </a:lnL>
+                    <a:lnR w="2540" cap="flat" cmpd="sng" algn="ctr">
+                      <a:solidFill>
+                        <a:srgbClr val="EEEEEE"/>
+                      </a:solidFill>
+                      <a:prstDash val="solid"/>
+                      <a:round/>
+                      <a:headEnd type="none" w="med" len="med"/>
+                      <a:tailEnd type="none" w="med" len="med"/>
+                    </a:lnR>
+                    <a:lnT w="2540" cap="flat" cmpd="sng" algn="ctr">
+                      <a:solidFill>
+                        <a:srgbClr val="EEEEEE"/>
+                      </a:solidFill>
+                      <a:prstDash val="solid"/>
+                      <a:round/>
+                      <a:headEnd type="none" w="med" len="med"/>
+                      <a:tailEnd type="none" w="med" len="med"/>
+                    </a:lnT>
+                    <a:lnB w="2540" cap="flat" cmpd="sng" algn="ctr">
+                      <a:solidFill>
+                        <a:srgbClr val="EEEEEE"/>
+                      </a:solidFill>
+                      <a:prstDash val="solid"/>
+                      <a:round/>
+                      <a:headEnd type="none" w="med" len="med"/>
+                      <a:tailEnd type="none" w="med" len="med"/>
+                    </a:lnB>
+                  </a:tcPr>
+                </a:tc>
+                <a:tc>
+                  <a:txBody>
+                    <a:bodyPr/>
+                    <a:lstStyle/>
+                    <a:p>
+                      <a:pPr algn="ctr" indent="0" marL="0">
+                        <a:buNone/>
+                      </a:pPr>
+                      <a:r>
+                        <a:rPr lang="en-US" sz="500" dirty="0">
+                          <a:solidFill>
+                            <a:srgbClr val="777777"/>
+                          </a:solidFill>
+                          <a:latin typeface="Calibri" pitchFamily="34" charset="0"/>
+                          <a:ea typeface="Calibri" pitchFamily="34" charset="-122"/>
+                          <a:cs typeface="Calibri" pitchFamily="34" charset="-120"/>
+                        </a:rPr>
+                        <a:t>0.39%</a:t>
+                      </a:r>
+                      <a:endParaRPr lang="en-US" sz="500" dirty="0">
+                        <a:latin typeface="Calibri" charset="0"/>
+                        <a:ea typeface="Calibri" charset="0"/>
+                        <a:cs typeface="Calibri" charset="0"/>
+                      </a:endParaRPr>
+                    </a:p>
+                  </a:txBody>
+                  <a:tcPr marL="91440" marR="91440" marT="45720" marB="45720">
+                    <a:lnL w="2540" cap="flat" cmpd="sng" algn="ctr">
+                      <a:solidFill>
+                        <a:srgbClr val="EEEEEE"/>
+                      </a:solidFill>
+                      <a:prstDash val="solid"/>
+                      <a:round/>
+                      <a:headEnd type="none" w="med" len="med"/>
+                      <a:tailEnd type="none" w="med" len="med"/>
+                    </a:lnL>
+                    <a:lnR w="2540" cap="flat" cmpd="sng" algn="ctr">
+                      <a:solidFill>
+                        <a:srgbClr val="EEEEEE"/>
+                      </a:solidFill>
+                      <a:prstDash val="solid"/>
+                      <a:round/>
+                      <a:headEnd type="none" w="med" len="med"/>
+                      <a:tailEnd type="none" w="med" len="med"/>
+                    </a:lnR>
+                    <a:lnT w="2540" cap="flat" cmpd="sng" algn="ctr">
+                      <a:solidFill>
+                        <a:srgbClr val="EEEEEE"/>
+                      </a:solidFill>
+                      <a:prstDash val="solid"/>
+                      <a:round/>
+                      <a:headEnd type="none" w="med" len="med"/>
+                      <a:tailEnd type="none" w="med" len="med"/>
+                    </a:lnT>
+                    <a:lnB w="2540" cap="flat" cmpd="sng" algn="ctr">
+                      <a:solidFill>
+                        <a:srgbClr val="EEEEEE"/>
+                      </a:solidFill>
+                      <a:prstDash val="solid"/>
+                      <a:round/>
+                      <a:headEnd type="none" w="med" len="med"/>
+                      <a:tailEnd type="none" w="med" len="med"/>
+                    </a:lnB>
+                  </a:tcPr>
+                </a:tc>
+                <a:tc>
+                  <a:txBody>
+                    <a:bodyPr/>
+                    <a:lstStyle/>
+                    <a:p>
+                      <a:pPr algn="ctr" indent="0" marL="0">
+                        <a:buNone/>
+                      </a:pPr>
+                      <a:r>
+                        <a:rPr lang="en-US" sz="500" dirty="0">
+                          <a:solidFill>
+                            <a:srgbClr val="777777"/>
+                          </a:solidFill>
+                          <a:latin typeface="Calibri" pitchFamily="34" charset="0"/>
+                          <a:ea typeface="Calibri" pitchFamily="34" charset="-122"/>
+                          <a:cs typeface="Calibri" pitchFamily="34" charset="-120"/>
+                        </a:rPr>
+                        <a:t>0.46%</a:t>
+                      </a:r>
+                      <a:endParaRPr lang="en-US" sz="500" dirty="0">
+                        <a:latin typeface="Calibri" charset="0"/>
+                        <a:ea typeface="Calibri" charset="0"/>
+                        <a:cs typeface="Calibri" charset="0"/>
+                      </a:endParaRPr>
+                    </a:p>
+                  </a:txBody>
+                  <a:tcPr marL="91440" marR="91440" marT="45720" marB="45720">
+                    <a:lnL w="2540" cap="flat" cmpd="sng" algn="ctr">
+                      <a:solidFill>
+                        <a:srgbClr val="EEEEEE"/>
+                      </a:solidFill>
+                      <a:prstDash val="solid"/>
+                      <a:round/>
+                      <a:headEnd type="none" w="med" len="med"/>
+                      <a:tailEnd type="none" w="med" len="med"/>
+                    </a:lnL>
+                    <a:lnR w="2540" cap="flat" cmpd="sng" algn="ctr">
+                      <a:solidFill>
+                        <a:srgbClr val="EEEEEE"/>
+                      </a:solidFill>
+                      <a:prstDash val="solid"/>
+                      <a:round/>
+                      <a:headEnd type="none" w="med" len="med"/>
+                      <a:tailEnd type="none" w="med" len="med"/>
+                    </a:lnR>
+                    <a:lnT w="2540" cap="flat" cmpd="sng" algn="ctr">
+                      <a:solidFill>
+                        <a:srgbClr val="EEEEEE"/>
+                      </a:solidFill>
+                      <a:prstDash val="solid"/>
+                      <a:round/>
+                      <a:headEnd type="none" w="med" len="med"/>
+                      <a:tailEnd type="none" w="med" len="med"/>
+                    </a:lnT>
+                    <a:lnB w="2540" cap="flat" cmpd="sng" algn="ctr">
+                      <a:solidFill>
+                        <a:srgbClr val="EEEEEE"/>
+                      </a:solidFill>
+                      <a:prstDash val="solid"/>
+                      <a:round/>
+                      <a:headEnd type="none" w="med" len="med"/>
+                      <a:tailEnd type="none" w="med" len="med"/>
+                    </a:lnB>
+                  </a:tcPr>
+                </a:tc>
+                <a:tc>
+                  <a:txBody>
+                    <a:bodyPr/>
+                    <a:lstStyle/>
+                    <a:p>
+                      <a:pPr algn="ctr" indent="0" marL="0">
+                        <a:buNone/>
+                      </a:pPr>
+                      <a:r>
+                        <a:rPr lang="en-US" sz="500" dirty="0">
+                          <a:solidFill>
+                            <a:srgbClr val="777777"/>
+                          </a:solidFill>
+                          <a:latin typeface="Calibri" pitchFamily="34" charset="0"/>
+                          <a:ea typeface="Calibri" pitchFamily="34" charset="-122"/>
+                          <a:cs typeface="Calibri" pitchFamily="34" charset="-120"/>
+                        </a:rPr>
+                        <a:t>0.43%</a:t>
+                      </a:r>
+                      <a:endParaRPr lang="en-US" sz="500" dirty="0">
+                        <a:latin typeface="Calibri" charset="0"/>
+                        <a:ea typeface="Calibri" charset="0"/>
+                        <a:cs typeface="Calibri" charset="0"/>
+                      </a:endParaRPr>
+                    </a:p>
+                  </a:txBody>
+                  <a:tcPr marL="91440" marR="91440" marT="45720" marB="45720">
+                    <a:lnL w="2540" cap="flat" cmpd="sng" algn="ctr">
+                      <a:solidFill>
+                        <a:srgbClr val="EEEEEE"/>
+                      </a:solidFill>
+                      <a:prstDash val="solid"/>
+                      <a:round/>
+                      <a:headEnd type="none" w="med" len="med"/>
+                      <a:tailEnd type="none" w="med" len="med"/>
+                    </a:lnL>
+                    <a:lnR w="2540" cap="flat" cmpd="sng" algn="ctr">
+                      <a:solidFill>
+                        <a:srgbClr val="EEEEEE"/>
+                      </a:solidFill>
+                      <a:prstDash val="solid"/>
+                      <a:round/>
+                      <a:headEnd type="none" w="med" len="med"/>
+                      <a:tailEnd type="none" w="med" len="med"/>
+                    </a:lnR>
+                    <a:lnT w="2540" cap="flat" cmpd="sng" algn="ctr">
+                      <a:solidFill>
+                        <a:srgbClr val="EEEEEE"/>
+                      </a:solidFill>
+                      <a:prstDash val="solid"/>
+                      <a:round/>
+                      <a:headEnd type="none" w="med" len="med"/>
+                      <a:tailEnd type="none" w="med" len="med"/>
+                    </a:lnT>
+                    <a:lnB w="2540" cap="flat" cmpd="sng" algn="ctr">
+                      <a:solidFill>
+                        <a:srgbClr val="EEEEEE"/>
+                      </a:solidFill>
+                      <a:prstDash val="solid"/>
+                      <a:round/>
+                      <a:headEnd type="none" w="med" len="med"/>
+                      <a:tailEnd type="none" w="med" len="med"/>
+                    </a:lnB>
+                  </a:tcPr>
+                </a:tc>
+                <a:tc>
+                  <a:txBody>
+                    <a:bodyPr/>
+                    <a:lstStyle/>
+                    <a:p>
+                      <a:pPr algn="ctr" indent="0" marL="0">
+                        <a:buNone/>
+                      </a:pPr>
+                      <a:r>
+                        <a:rPr lang="en-US" sz="500" dirty="0">
+                          <a:solidFill>
+                            <a:srgbClr val="777777"/>
+                          </a:solidFill>
+                          <a:latin typeface="Calibri" pitchFamily="34" charset="0"/>
+                          <a:ea typeface="Calibri" pitchFamily="34" charset="-122"/>
+                          <a:cs typeface="Calibri" pitchFamily="34" charset="-120"/>
+                        </a:rPr>
+                        <a:t>0.39%</a:t>
+                      </a:r>
+                      <a:endParaRPr lang="en-US" sz="500" dirty="0">
+                        <a:latin typeface="Calibri" charset="0"/>
+                        <a:ea typeface="Calibri" charset="0"/>
+                        <a:cs typeface="Calibri" charset="0"/>
+                      </a:endParaRPr>
+                    </a:p>
+                  </a:txBody>
+                  <a:tcPr marL="91440" marR="91440" marT="45720" marB="45720">
+                    <a:lnL w="2540" cap="flat" cmpd="sng" algn="ctr">
+                      <a:solidFill>
+                        <a:srgbClr val="EEEEEE"/>
+                      </a:solidFill>
+                      <a:prstDash val="solid"/>
+                      <a:round/>
+                      <a:headEnd type="none" w="med" len="med"/>
+                      <a:tailEnd type="none" w="med" len="med"/>
+                    </a:lnL>
+                    <a:lnR w="2540" cap="flat" cmpd="sng" algn="ctr">
+                      <a:solidFill>
+                        <a:srgbClr val="EEEEEE"/>
+                      </a:solidFill>
+                      <a:prstDash val="solid"/>
+                      <a:round/>
+                      <a:headEnd type="none" w="med" len="med"/>
+                      <a:tailEnd type="none" w="med" len="med"/>
+                    </a:lnR>
+                    <a:lnT w="2540" cap="flat" cmpd="sng" algn="ctr">
+                      <a:solidFill>
+                        <a:srgbClr val="EEEEEE"/>
+                      </a:solidFill>
+                      <a:prstDash val="solid"/>
+                      <a:round/>
+                      <a:headEnd type="none" w="med" len="med"/>
+                      <a:tailEnd type="none" w="med" len="med"/>
+                    </a:lnT>
+                    <a:lnB w="2540" cap="flat" cmpd="sng" algn="ctr">
+                      <a:solidFill>
+                        <a:srgbClr val="EEEEEE"/>
+                      </a:solidFill>
+                      <a:prstDash val="solid"/>
+                      <a:round/>
+                      <a:headEnd type="none" w="med" len="med"/>
+                      <a:tailEnd type="none" w="med" len="med"/>
+                    </a:lnB>
+                  </a:tcPr>
+                </a:tc>
+                <a:tc>
+                  <a:txBody>
+                    <a:bodyPr/>
+                    <a:lstStyle/>
+                    <a:p>
+                      <a:pPr algn="ctr" indent="0" marL="0">
+                        <a:buNone/>
+                      </a:pPr>
+                      <a:r>
+                        <a:rPr lang="en-US" sz="500" dirty="0">
+                          <a:solidFill>
+                            <a:srgbClr val="777777"/>
+                          </a:solidFill>
+                          <a:latin typeface="Calibri" pitchFamily="34" charset="0"/>
+                          <a:ea typeface="Calibri" pitchFamily="34" charset="-122"/>
+                          <a:cs typeface="Calibri" pitchFamily="34" charset="-120"/>
+                        </a:rPr>
+                        <a:t>0.46%</a:t>
+                      </a:r>
+                      <a:endParaRPr lang="en-US" sz="500" dirty="0">
+                        <a:latin typeface="Calibri" charset="0"/>
+                        <a:ea typeface="Calibri" charset="0"/>
+                        <a:cs typeface="Calibri" charset="0"/>
+                      </a:endParaRPr>
+                    </a:p>
+                  </a:txBody>
+                  <a:tcPr marL="91440" marR="91440" marT="45720" marB="45720">
+                    <a:lnL w="2540" cap="flat" cmpd="sng" algn="ctr">
+                      <a:solidFill>
+                        <a:srgbClr val="EEEEEE"/>
+                      </a:solidFill>
+                      <a:prstDash val="solid"/>
+                      <a:round/>
+                      <a:headEnd type="none" w="med" len="med"/>
+                      <a:tailEnd type="none" w="med" len="med"/>
+                    </a:lnL>
+                    <a:lnR w="2540" cap="flat" cmpd="sng" algn="ctr">
+                      <a:solidFill>
+                        <a:srgbClr val="EEEEEE"/>
+                      </a:solidFill>
+                      <a:prstDash val="solid"/>
+                      <a:round/>
+                      <a:headEnd type="none" w="med" len="med"/>
+                      <a:tailEnd type="none" w="med" len="med"/>
+                    </a:lnR>
+                    <a:lnT w="2540" cap="flat" cmpd="sng" algn="ctr">
+                      <a:solidFill>
+                        <a:srgbClr val="EEEEEE"/>
+                      </a:solidFill>
+                      <a:prstDash val="solid"/>
+                      <a:round/>
+                      <a:headEnd type="none" w="med" len="med"/>
+                      <a:tailEnd type="none" w="med" len="med"/>
+                    </a:lnT>
+                    <a:lnB w="2540" cap="flat" cmpd="sng" algn="ctr">
+                      <a:solidFill>
+                        <a:srgbClr val="EEEEEE"/>
+                      </a:solidFill>
+                      <a:prstDash val="solid"/>
+                      <a:round/>
+                      <a:headEnd type="none" w="med" len="med"/>
+                      <a:tailEnd type="none" w="med" len="med"/>
+                    </a:lnB>
+                  </a:tcPr>
+                </a:tc>
+                <a:tc>
+                  <a:txBody>
+                    <a:bodyPr/>
+                    <a:lstStyle/>
+                    <a:p>
+                      <a:pPr algn="ctr" indent="0" marL="0">
+                        <a:buNone/>
+                      </a:pPr>
+                      <a:r>
+                        <a:rPr lang="en-US" sz="500" dirty="0">
+                          <a:solidFill>
+                            <a:srgbClr val="777777"/>
+                          </a:solidFill>
+                          <a:latin typeface="Calibri" pitchFamily="34" charset="0"/>
+                          <a:ea typeface="Calibri" pitchFamily="34" charset="-122"/>
+                          <a:cs typeface="Calibri" pitchFamily="34" charset="-120"/>
+                        </a:rPr>
+                        <a:t>0.42%</a:t>
+                      </a:r>
+                      <a:endParaRPr lang="en-US" sz="500" dirty="0">
+                        <a:latin typeface="Calibri" charset="0"/>
+                        <a:ea typeface="Calibri" charset="0"/>
+                        <a:cs typeface="Calibri" charset="0"/>
+                      </a:endParaRPr>
+                    </a:p>
+                  </a:txBody>
+                  <a:tcPr marL="91440" marR="91440" marT="45720" marB="45720">
+                    <a:lnL w="2540" cap="flat" cmpd="sng" algn="ctr">
+                      <a:solidFill>
+                        <a:srgbClr val="EEEEEE"/>
+                      </a:solidFill>
+                      <a:prstDash val="solid"/>
+                      <a:round/>
+                      <a:headEnd type="none" w="med" len="med"/>
+                      <a:tailEnd type="none" w="med" len="med"/>
+                    </a:lnL>
+                    <a:lnR w="2540" cap="flat" cmpd="sng" algn="ctr">
+                      <a:solidFill>
+                        <a:srgbClr val="EEEEEE"/>
+                      </a:solidFill>
+                      <a:prstDash val="solid"/>
+                      <a:round/>
+                      <a:headEnd type="none" w="med" len="med"/>
+                      <a:tailEnd type="none" w="med" len="med"/>
+                    </a:lnR>
+                    <a:lnT w="2540" cap="flat" cmpd="sng" algn="ctr">
+                      <a:solidFill>
+                        <a:srgbClr val="EEEEEE"/>
+                      </a:solidFill>
+                      <a:prstDash val="solid"/>
+                      <a:round/>
+                      <a:headEnd type="none" w="med" len="med"/>
+                      <a:tailEnd type="none" w="med" len="med"/>
+                    </a:lnT>
+                    <a:lnB w="2540" cap="flat" cmpd="sng" algn="ctr">
+                      <a:solidFill>
+                        <a:srgbClr val="EEEEEE"/>
+                      </a:solidFill>
+                      <a:prstDash val="solid"/>
+                      <a:round/>
+                      <a:headEnd type="none" w="med" len="med"/>
+                      <a:tailEnd type="none" w="med" len="med"/>
+                    </a:lnB>
+                  </a:tcPr>
+                </a:tc>
+                <a:tc>
+                  <a:txBody>
+                    <a:bodyPr/>
+                    <a:lstStyle/>
+                    <a:p>
+                      <a:pPr algn="ctr" indent="0" marL="0">
+                        <a:buNone/>
+                      </a:pPr>
+                      <a:r>
+                        <a:rPr lang="en-US" sz="500" dirty="0">
+                          <a:solidFill>
+                            <a:srgbClr val="777777"/>
+                          </a:solidFill>
+                          <a:latin typeface="Calibri" pitchFamily="34" charset="0"/>
+                          <a:ea typeface="Calibri" pitchFamily="34" charset="-122"/>
+                          <a:cs typeface="Calibri" pitchFamily="34" charset="-120"/>
+                        </a:rPr>
+                        <a:t>0.43%</a:t>
+                      </a:r>
+                      <a:endParaRPr lang="en-US" sz="500" dirty="0">
+                        <a:latin typeface="Calibri" charset="0"/>
+                        <a:ea typeface="Calibri" charset="0"/>
+                        <a:cs typeface="Calibri" charset="0"/>
+                      </a:endParaRPr>
+                    </a:p>
+                  </a:txBody>
+                  <a:tcPr marL="91440" marR="91440" marT="45720" marB="45720">
+                    <a:lnL w="2540" cap="flat" cmpd="sng" algn="ctr">
+                      <a:solidFill>
+                        <a:srgbClr val="EEEEEE"/>
+                      </a:solidFill>
+                      <a:prstDash val="solid"/>
+                      <a:round/>
+                      <a:headEnd type="none" w="med" len="med"/>
+                      <a:tailEnd type="none" w="med" len="med"/>
+                    </a:lnL>
+                    <a:lnR w="2540" cap="flat" cmpd="sng" algn="ctr">
+                      <a:solidFill>
+                        <a:srgbClr val="EEEEEE"/>
+                      </a:solidFill>
+                      <a:prstDash val="solid"/>
+                      <a:round/>
+                      <a:headEnd type="none" w="med" len="med"/>
+                      <a:tailEnd type="none" w="med" len="med"/>
+                    </a:lnR>
+                    <a:lnT w="2540" cap="flat" cmpd="sng" algn="ctr">
+                      <a:solidFill>
+                        <a:srgbClr val="EEEEEE"/>
+                      </a:solidFill>
+                      <a:prstDash val="solid"/>
+                      <a:round/>
+                      <a:headEnd type="none" w="med" len="med"/>
+                      <a:tailEnd type="none" w="med" len="med"/>
+                    </a:lnT>
+                    <a:lnB w="2540" cap="flat" cmpd="sng" algn="ctr">
+                      <a:solidFill>
+                        <a:srgbClr val="EEEEEE"/>
+                      </a:solidFill>
+                      <a:prstDash val="solid"/>
+                      <a:round/>
+                      <a:headEnd type="none" w="med" len="med"/>
+                      <a:tailEnd type="none" w="med" len="med"/>
+                    </a:lnB>
+                  </a:tcPr>
+                </a:tc>
+                <a:tc>
+                  <a:txBody>
+                    <a:bodyPr/>
+                    <a:lstStyle/>
+                    <a:p>
+                      <a:pPr algn="ctr" indent="0" marL="0">
+                        <a:buNone/>
+                      </a:pPr>
+                      <a:r>
+                        <a:rPr lang="en-US" sz="500" dirty="0">
+                          <a:solidFill>
+                            <a:srgbClr val="777777"/>
+                          </a:solidFill>
+                          <a:latin typeface="Calibri" pitchFamily="34" charset="0"/>
+                          <a:ea typeface="Calibri" pitchFamily="34" charset="-122"/>
+                          <a:cs typeface="Calibri" pitchFamily="34" charset="-120"/>
+                        </a:rPr>
+                        <a:t>0.41%</a:t>
+                      </a:r>
+                      <a:endParaRPr lang="en-US" sz="500" dirty="0">
+                        <a:latin typeface="Calibri" charset="0"/>
+                        <a:ea typeface="Calibri" charset="0"/>
+                        <a:cs typeface="Calibri" charset="0"/>
+                      </a:endParaRPr>
+                    </a:p>
+                  </a:txBody>
+                  <a:tcPr marL="91440" marR="91440" marT="45720" marB="45720">
+                    <a:lnL w="2540" cap="flat" cmpd="sng" algn="ctr">
+                      <a:solidFill>
+                        <a:srgbClr val="EEEEEE"/>
+                      </a:solidFill>
+                      <a:prstDash val="solid"/>
+                      <a:round/>
+                      <a:headEnd type="none" w="med" len="med"/>
+                      <a:tailEnd type="none" w="med" len="med"/>
+                    </a:lnL>
+                    <a:lnR w="2540" cap="flat" cmpd="sng" algn="ctr">
+                      <a:solidFill>
+                        <a:srgbClr val="EEEEEE"/>
+                      </a:solidFill>
+                      <a:prstDash val="solid"/>
+                      <a:round/>
+                      <a:headEnd type="none" w="med" len="med"/>
+                      <a:tailEnd type="none" w="med" len="med"/>
+                    </a:lnR>
+                    <a:lnT w="2540" cap="flat" cmpd="sng" algn="ctr">
+                      <a:solidFill>
+                        <a:srgbClr val="EEEEEE"/>
+                      </a:solidFill>
+                      <a:prstDash val="solid"/>
+                      <a:round/>
+                      <a:headEnd type="none" w="med" len="med"/>
+                      <a:tailEnd type="none" w="med" len="med"/>
+                    </a:lnT>
+                    <a:lnB w="2540" cap="flat" cmpd="sng" algn="ctr">
+                      <a:solidFill>
+                        <a:srgbClr val="EEEEEE"/>
+                      </a:solidFill>
+                      <a:prstDash val="solid"/>
+                      <a:round/>
+                      <a:headEnd type="none" w="med" len="med"/>
+                      <a:tailEnd type="none" w="med" len="med"/>
+                    </a:lnB>
+                  </a:tcPr>
+                </a:tc>
+                <a:tc>
+                  <a:txBody>
+                    <a:bodyPr/>
+                    <a:lstStyle/>
+                    <a:p>
+                      <a:pPr algn="ctr" indent="0" marL="0">
+                        <a:buNone/>
+                      </a:pPr>
+                      <a:r>
+                        <a:rPr lang="en-US" sz="500" dirty="0">
+                          <a:solidFill>
+                            <a:srgbClr val="777777"/>
+                          </a:solidFill>
+                          <a:latin typeface="Calibri" pitchFamily="34" charset="0"/>
+                          <a:ea typeface="Calibri" pitchFamily="34" charset="-122"/>
+                          <a:cs typeface="Calibri" pitchFamily="34" charset="-120"/>
+                        </a:rPr>
+                        <a:t>0.39%</a:t>
+                      </a:r>
+                      <a:endParaRPr lang="en-US" sz="500" dirty="0">
+                        <a:latin typeface="Calibri" charset="0"/>
+                        <a:ea typeface="Calibri" charset="0"/>
+                        <a:cs typeface="Calibri" charset="0"/>
+                      </a:endParaRPr>
+                    </a:p>
+                  </a:txBody>
+                  <a:tcPr marL="91440" marR="91440" marT="45720" marB="45720">
+                    <a:lnL w="2540" cap="flat" cmpd="sng" algn="ctr">
+                      <a:solidFill>
+                        <a:srgbClr val="EEEEEE"/>
+                      </a:solidFill>
+                      <a:prstDash val="solid"/>
+                      <a:round/>
+                      <a:headEnd type="none" w="med" len="med"/>
+                      <a:tailEnd type="none" w="med" len="med"/>
+                    </a:lnL>
+                    <a:lnR w="2540" cap="flat" cmpd="sng" algn="ctr">
+                      <a:solidFill>
+                        <a:srgbClr val="EEEEEE"/>
+                      </a:solidFill>
+                      <a:prstDash val="solid"/>
+                      <a:round/>
+                      <a:headEnd type="none" w="med" len="med"/>
+                      <a:tailEnd type="none" w="med" len="med"/>
+                    </a:lnR>
+                    <a:lnT w="2540" cap="flat" cmpd="sng" algn="ctr">
+                      <a:solidFill>
+                        <a:srgbClr val="EEEEEE"/>
+                      </a:solidFill>
+                      <a:prstDash val="solid"/>
+                      <a:round/>
+                      <a:headEnd type="none" w="med" len="med"/>
+                      <a:tailEnd type="none" w="med" len="med"/>
+                    </a:lnT>
+                    <a:lnB w="2540" cap="flat" cmpd="sng" algn="ctr">
+                      <a:solidFill>
+                        <a:srgbClr val="EEEEEE"/>
+                      </a:solidFill>
+                      <a:prstDash val="solid"/>
+                      <a:round/>
+                      <a:headEnd type="none" w="med" len="med"/>
+                      <a:tailEnd type="none" w="med" len="med"/>
+                    </a:lnB>
+                  </a:tcPr>
+                </a:tc>
+                <a:tc>
+                  <a:txBody>
+                    <a:bodyPr/>
+                    <a:lstStyle/>
+                    <a:p>
+                      <a:pPr algn="ctr" indent="0" marL="0">
+                        <a:buNone/>
+                      </a:pPr>
+                      <a:r>
+                        <a:rPr lang="en-US" sz="500" dirty="0">
+                          <a:solidFill>
+                            <a:srgbClr val="777777"/>
+                          </a:solidFill>
+                          <a:latin typeface="Calibri" pitchFamily="34" charset="0"/>
+                          <a:ea typeface="Calibri" pitchFamily="34" charset="-122"/>
+                          <a:cs typeface="Calibri" pitchFamily="34" charset="-120"/>
+                        </a:rPr>
+                        <a:t>0.39%</a:t>
+                      </a:r>
+                      <a:endParaRPr lang="en-US" sz="500" dirty="0">
+                        <a:latin typeface="Calibri" charset="0"/>
+                        <a:ea typeface="Calibri" charset="0"/>
+                        <a:cs typeface="Calibri" charset="0"/>
+                      </a:endParaRPr>
+                    </a:p>
+                  </a:txBody>
+                  <a:tcPr marL="91440" marR="91440" marT="45720" marB="45720">
+                    <a:lnL w="2540" cap="flat" cmpd="sng" algn="ctr">
+                      <a:solidFill>
+                        <a:srgbClr val="EEEEEE"/>
+                      </a:solidFill>
+                      <a:prstDash val="solid"/>
+                      <a:round/>
+                      <a:headEnd type="none" w="med" len="med"/>
+                      <a:tailEnd type="none" w="med" len="med"/>
+                    </a:lnL>
+                    <a:lnR w="2540" cap="flat" cmpd="sng" algn="ctr">
+                      <a:solidFill>
+                        <a:srgbClr val="EEEEEE"/>
+                      </a:solidFill>
+                      <a:prstDash val="solid"/>
+                      <a:round/>
+                      <a:headEnd type="none" w="med" len="med"/>
+                      <a:tailEnd type="none" w="med" len="med"/>
+                    </a:lnR>
+                    <a:lnT w="2540" cap="flat" cmpd="sng" algn="ctr">
+                      <a:solidFill>
+                        <a:srgbClr val="EEEEEE"/>
+                      </a:solidFill>
+                      <a:prstDash val="solid"/>
+                      <a:round/>
+                      <a:headEnd type="none" w="med" len="med"/>
+                      <a:tailEnd type="none" w="med" len="med"/>
+                    </a:lnT>
+                    <a:lnB w="2540" cap="flat" cmpd="sng" algn="ctr">
+                      <a:solidFill>
+                        <a:srgbClr val="EEEEEE"/>
+                      </a:solidFill>
+                      <a:prstDash val="solid"/>
+                      <a:round/>
+                      <a:headEnd type="none" w="med" len="med"/>
+                      <a:tailEnd type="none" w="med" len="med"/>
+                    </a:lnB>
+                  </a:tcPr>
+                </a:tc>
+                <a:tc>
+                  <a:txBody>
+                    <a:bodyPr/>
+                    <a:lstStyle/>
+                    <a:p>
+                      <a:pPr algn="ctr" indent="0" marL="0">
+                        <a:buNone/>
+                      </a:pPr>
+                      <a:r>
+                        <a:rPr lang="en-US" sz="500" b="1" dirty="0">
+                          <a:solidFill>
+                            <a:srgbClr val="777777"/>
+                          </a:solidFill>
+                          <a:latin typeface="Calibri" pitchFamily="34" charset="0"/>
+                          <a:ea typeface="Calibri" pitchFamily="34" charset="-122"/>
+                          <a:cs typeface="Calibri" pitchFamily="34" charset="-120"/>
+                        </a:rPr>
+                        <a:t>5.15%</a:t>
+                      </a:r>
+                      <a:endParaRPr lang="en-US" sz="500" dirty="0">
+                        <a:latin typeface="Calibri" charset="0"/>
+                        <a:ea typeface="Calibri" charset="0"/>
+                        <a:cs typeface="Calibri" charset="0"/>
+                      </a:endParaRPr>
+                    </a:p>
+                  </a:txBody>
+                  <a:tcPr marL="91440" marR="91440" marT="45720" marB="45720">
+                    <a:lnL w="2540" cap="flat" cmpd="sng" algn="ctr">
+                      <a:solidFill>
+                        <a:srgbClr val="EEEEEE"/>
+                      </a:solidFill>
+                      <a:prstDash val="solid"/>
+                      <a:round/>
+                      <a:headEnd type="none" w="med" len="med"/>
+                      <a:tailEnd type="none" w="med" len="med"/>
+                    </a:lnL>
+                    <a:lnR w="2540" cap="flat" cmpd="sng" algn="ctr">
+                      <a:solidFill>
+                        <a:srgbClr val="EEEEEE"/>
+                      </a:solidFill>
+                      <a:prstDash val="solid"/>
+                      <a:round/>
+                      <a:headEnd type="none" w="med" len="med"/>
+                      <a:tailEnd type="none" w="med" len="med"/>
+                    </a:lnR>
+                    <a:lnT w="2540" cap="flat" cmpd="sng" algn="ctr">
+                      <a:solidFill>
+                        <a:srgbClr val="EEEEEE"/>
+                      </a:solidFill>
+                      <a:prstDash val="solid"/>
+                      <a:round/>
+                      <a:headEnd type="none" w="med" len="med"/>
+                      <a:tailEnd type="none" w="med" len="med"/>
+                    </a:lnT>
+                    <a:lnB w="2540" cap="flat" cmpd="sng" algn="ctr">
+                      <a:solidFill>
+                        <a:srgbClr val="EEEEEE"/>
+                      </a:solidFill>
+                      <a:prstDash val="solid"/>
+                      <a:round/>
+                      <a:headEnd type="none" w="med" len="med"/>
+                      <a:tailEnd type="none" w="med" len="med"/>
+                    </a:lnB>
+                  </a:tcPr>
+                </a:tc>
+              </a:tr>
+              <a:tr h="123444">
+                <a:tc>
+                  <a:txBody>
+                    <a:bodyPr/>
+                    <a:lstStyle/>
+                    <a:p>
+                      <a:pPr algn="l" indent="0" marL="0">
+                        <a:buNone/>
+                      </a:pPr>
+                      <a:r>
+                        <a:rPr lang="en-US" sz="500" b="1" dirty="0">
+                          <a:solidFill>
+                            <a:srgbClr val="000000"/>
+                          </a:solidFill>
+                          <a:latin typeface="Calibri" pitchFamily="34" charset="0"/>
+                          <a:ea typeface="Calibri" pitchFamily="34" charset="-122"/>
+                          <a:cs typeface="Calibri" pitchFamily="34" charset="-120"/>
+                        </a:rPr>
+                        <a:t>2022</a:t>
+                      </a:r>
+                      <a:endParaRPr lang="en-US" sz="500" dirty="0">
+                        <a:latin typeface="Calibri" charset="0"/>
+                        <a:ea typeface="Calibri" charset="0"/>
+                        <a:cs typeface="Calibri" charset="0"/>
+                      </a:endParaRPr>
+                    </a:p>
+                  </a:txBody>
+                  <a:tcPr marL="91440" marR="91440" marT="45720" marB="45720">
+                    <a:lnL w="2540" cap="flat" cmpd="sng" algn="ctr">
+                      <a:solidFill>
+                        <a:srgbClr val="EEEEEE"/>
+                      </a:solidFill>
+                      <a:prstDash val="solid"/>
+                      <a:round/>
+                      <a:headEnd type="none" w="med" len="med"/>
+                      <a:tailEnd type="none" w="med" len="med"/>
+                    </a:lnL>
+                    <a:lnR w="2540" cap="flat" cmpd="sng" algn="ctr">
+                      <a:solidFill>
+                        <a:srgbClr val="EEEEEE"/>
+                      </a:solidFill>
+                      <a:prstDash val="solid"/>
+                      <a:round/>
+                      <a:headEnd type="none" w="med" len="med"/>
+                      <a:tailEnd type="none" w="med" len="med"/>
+                    </a:lnR>
+                    <a:lnT w="2540" cap="flat" cmpd="sng" algn="ctr">
+                      <a:solidFill>
+                        <a:srgbClr val="EEEEEE"/>
+                      </a:solidFill>
+                      <a:prstDash val="solid"/>
+                      <a:round/>
+                      <a:headEnd type="none" w="med" len="med"/>
+                      <a:tailEnd type="none" w="med" len="med"/>
+                    </a:lnT>
+                    <a:lnB w="2540" cap="flat" cmpd="sng" algn="ctr">
+                      <a:solidFill>
+                        <a:srgbClr val="EEEEEE"/>
+                      </a:solidFill>
+                      <a:prstDash val="solid"/>
+                      <a:round/>
+                      <a:headEnd type="none" w="med" len="med"/>
+                      <a:tailEnd type="none" w="med" len="med"/>
+                    </a:lnB>
+                  </a:tcPr>
+                </a:tc>
+                <a:tc>
+                  <a:txBody>
+                    <a:bodyPr/>
+                    <a:lstStyle/>
+                    <a:p>
+                      <a:pPr algn="l" indent="0" marL="0">
+                        <a:buNone/>
+                      </a:pPr>
+                      <a:r>
+                        <a:rPr lang="en-US" sz="500" dirty="0">
+                          <a:solidFill>
+                            <a:srgbClr val="777777"/>
+                          </a:solidFill>
+                          <a:latin typeface="Calibri" pitchFamily="34" charset="0"/>
+                          <a:ea typeface="Calibri" pitchFamily="34" charset="-122"/>
+                          <a:cs typeface="Calibri" pitchFamily="34" charset="-120"/>
+                        </a:rPr>
+                        <a:t>ICP</a:t>
+                      </a:r>
+                      <a:endParaRPr lang="en-US" sz="500" dirty="0">
+                        <a:latin typeface="Calibri" charset="0"/>
+                        <a:ea typeface="Calibri" charset="0"/>
+                        <a:cs typeface="Calibri" charset="0"/>
+                      </a:endParaRPr>
+                    </a:p>
+                  </a:txBody>
+                  <a:tcPr marL="91440" marR="91440" marT="45720" marB="45720">
+                    <a:lnL w="2540" cap="flat" cmpd="sng" algn="ctr">
+                      <a:solidFill>
+                        <a:srgbClr val="EEEEEE"/>
+                      </a:solidFill>
+                      <a:prstDash val="solid"/>
+                      <a:round/>
+                      <a:headEnd type="none" w="med" len="med"/>
+                      <a:tailEnd type="none" w="med" len="med"/>
+                    </a:lnL>
+                    <a:lnR w="2540" cap="flat" cmpd="sng" algn="ctr">
+                      <a:solidFill>
+                        <a:srgbClr val="EEEEEE"/>
+                      </a:solidFill>
+                      <a:prstDash val="solid"/>
+                      <a:round/>
+                      <a:headEnd type="none" w="med" len="med"/>
+                      <a:tailEnd type="none" w="med" len="med"/>
+                    </a:lnR>
+                    <a:lnT w="2540" cap="flat" cmpd="sng" algn="ctr">
+                      <a:solidFill>
+                        <a:srgbClr val="EEEEEE"/>
+                      </a:solidFill>
+                      <a:prstDash val="solid"/>
+                      <a:round/>
+                      <a:headEnd type="none" w="med" len="med"/>
+                      <a:tailEnd type="none" w="med" len="med"/>
+                    </a:lnT>
+                    <a:lnB w="2540" cap="flat" cmpd="sng" algn="ctr">
+                      <a:solidFill>
+                        <a:srgbClr val="EEEEEE"/>
+                      </a:solidFill>
+                      <a:prstDash val="solid"/>
+                      <a:round/>
+                      <a:headEnd type="none" w="med" len="med"/>
+                      <a:tailEnd type="none" w="med" len="med"/>
+                    </a:lnB>
+                  </a:tcPr>
+                </a:tc>
+                <a:tc>
+                  <a:txBody>
+                    <a:bodyPr/>
+                    <a:lstStyle/>
+                    <a:p>
+                      <a:pPr algn="ctr" indent="0" marL="0">
+                        <a:buNone/>
+                      </a:pPr>
                       <a:endParaRPr lang="en-US" sz="500" dirty="0">
                         <a:latin typeface="Calibri" charset="0"/>
                         <a:ea typeface="Calibri" charset="0"/>
@@ -18507,7 +19484,7 @@
                           <a:ea typeface="Calibri" pitchFamily="34" charset="-122"/>
                           <a:cs typeface="Calibri" pitchFamily="34" charset="-120"/>
                         </a:rPr>
-                        <a:t>0.38%</a:t>
+                        <a:t>-25.44%</a:t>
                       </a:r>
                       <a:endParaRPr lang="en-US" sz="500" dirty="0">
                         <a:latin typeface="Calibri" charset="0"/>
@@ -19004,7 +19981,7 @@
                           <a:ea typeface="Calibri" pitchFamily="34" charset="-122"/>
                           <a:cs typeface="Calibri" pitchFamily="34" charset="-120"/>
                         </a:rPr>
-                        <a:t>3.39%</a:t>
+                        <a:t>-74.63%</a:t>
                       </a:r>
                       <a:endParaRPr lang="en-US" sz="500" dirty="0">
                         <a:latin typeface="Calibri" charset="0"/>
@@ -19385,7 +20362,7 @@
                           <a:ea typeface="Calibri" pitchFamily="34" charset="-122"/>
                           <a:cs typeface="Calibri" pitchFamily="34" charset="-120"/>
                         </a:rPr>
-                        <a:t>0.26%</a:t>
+                        <a:t>-100.00%</a:t>
                       </a:r>
                       <a:endParaRPr lang="en-US" sz="500" dirty="0">
                         <a:latin typeface="Calibri" charset="0"/>
@@ -19882,7 +20859,7 @@
                           <a:ea typeface="Calibri" pitchFamily="34" charset="-122"/>
                           <a:cs typeface="Calibri" pitchFamily="34" charset="-120"/>
                         </a:rPr>
-                        <a:t>2.32%</a:t>
+                        <a:t>-300.00%</a:t>
                       </a:r>
                       <a:endParaRPr lang="en-US" sz="500" dirty="0">
                         <a:latin typeface="Calibri" charset="0"/>

--- a/folletos/2026-04/pptx/FIP_VANTRUST_LIQUIDEZ_LOCAL.pptx
+++ b/folletos/2026-04/pptx/FIP_VANTRUST_LIQUIDEZ_LOCAL.pptx
@@ -3797,7 +3797,7 @@
                 <a:ea typeface="Calibri" pitchFamily="34" charset="-122"/>
                 <a:cs typeface="Calibri" pitchFamily="34" charset="-120"/>
               </a:rPr>
-              <a:t>prueba CLP</a:t>
+              <a:t>prueba 14 CLP</a:t>
             </a:r>
             <a:endParaRPr lang="en-US" sz="800" dirty="0"/>
           </a:p>
